--- a/specs/presentation/Data-Collector-Canva-Template-v3_refactor.pptx
+++ b/specs/presentation/Data-Collector-Canva-Template-v3_refactor.pptx
@@ -12,10 +12,8 @@
     <p:sldId id="260" r:id="rId6"/>
     <p:sldId id="261" r:id="rId7"/>
     <p:sldId id="262" r:id="rId8"/>
-    <p:sldId id="263" r:id="rId9"/>
-    <p:sldId id="264" r:id="rId10"/>
-    <p:sldId id="265" r:id="rId11"/>
-    <p:sldId id="266" r:id="rId12"/>
+    <p:sldId id="265" r:id="rId9"/>
+    <p:sldId id="266" r:id="rId10"/>
   </p:sldIdLst>
   <p:sldSz cx="12192000" cy="6858000"/>
   <p:notesSz cx="6858000" cy="9144000"/>
@@ -312,7 +310,7 @@
           <a:p>
             <a:fld id="{5BCAD085-E8A6-8845-BD4E-CB4CCA059FC4}" type="datetimeFigureOut">
               <a:rPr lang="en-US" smtClean="0"/>
-              <a:t>6/10/2026</a:t>
+              <a:t>6/11/2026</a:t>
             </a:fld>
             <a:endParaRPr lang="en-US"/>
           </a:p>
@@ -480,7 +478,7 @@
           <a:p>
             <a:fld id="{5BCAD085-E8A6-8845-BD4E-CB4CCA059FC4}" type="datetimeFigureOut">
               <a:rPr lang="en-US" smtClean="0"/>
-              <a:t>6/10/2026</a:t>
+              <a:t>6/11/2026</a:t>
             </a:fld>
             <a:endParaRPr lang="en-US"/>
           </a:p>
@@ -658,7 +656,7 @@
           <a:p>
             <a:fld id="{5BCAD085-E8A6-8845-BD4E-CB4CCA059FC4}" type="datetimeFigureOut">
               <a:rPr lang="en-US" smtClean="0"/>
-              <a:t>6/10/2026</a:t>
+              <a:t>6/11/2026</a:t>
             </a:fld>
             <a:endParaRPr lang="en-US"/>
           </a:p>
@@ -826,7 +824,7 @@
           <a:p>
             <a:fld id="{5BCAD085-E8A6-8845-BD4E-CB4CCA059FC4}" type="datetimeFigureOut">
               <a:rPr lang="en-US" smtClean="0"/>
-              <a:t>6/10/2026</a:t>
+              <a:t>6/11/2026</a:t>
             </a:fld>
             <a:endParaRPr lang="en-US"/>
           </a:p>
@@ -1071,7 +1069,7 @@
           <a:p>
             <a:fld id="{5BCAD085-E8A6-8845-BD4E-CB4CCA059FC4}" type="datetimeFigureOut">
               <a:rPr lang="en-US" smtClean="0"/>
-              <a:t>6/10/2026</a:t>
+              <a:t>6/11/2026</a:t>
             </a:fld>
             <a:endParaRPr lang="en-US"/>
           </a:p>
@@ -1356,7 +1354,7 @@
           <a:p>
             <a:fld id="{5BCAD085-E8A6-8845-BD4E-CB4CCA059FC4}" type="datetimeFigureOut">
               <a:rPr lang="en-US" smtClean="0"/>
-              <a:t>6/10/2026</a:t>
+              <a:t>6/11/2026</a:t>
             </a:fld>
             <a:endParaRPr lang="en-US"/>
           </a:p>
@@ -1775,7 +1773,7 @@
           <a:p>
             <a:fld id="{5BCAD085-E8A6-8845-BD4E-CB4CCA059FC4}" type="datetimeFigureOut">
               <a:rPr lang="en-US" smtClean="0"/>
-              <a:t>6/10/2026</a:t>
+              <a:t>6/11/2026</a:t>
             </a:fld>
             <a:endParaRPr lang="en-US"/>
           </a:p>
@@ -1892,7 +1890,7 @@
           <a:p>
             <a:fld id="{5BCAD085-E8A6-8845-BD4E-CB4CCA059FC4}" type="datetimeFigureOut">
               <a:rPr lang="en-US" smtClean="0"/>
-              <a:t>6/10/2026</a:t>
+              <a:t>6/11/2026</a:t>
             </a:fld>
             <a:endParaRPr lang="en-US"/>
           </a:p>
@@ -1987,7 +1985,7 @@
           <a:p>
             <a:fld id="{5BCAD085-E8A6-8845-BD4E-CB4CCA059FC4}" type="datetimeFigureOut">
               <a:rPr lang="en-US" smtClean="0"/>
-              <a:t>6/10/2026</a:t>
+              <a:t>6/11/2026</a:t>
             </a:fld>
             <a:endParaRPr lang="en-US"/>
           </a:p>
@@ -2262,7 +2260,7 @@
           <a:p>
             <a:fld id="{5BCAD085-E8A6-8845-BD4E-CB4CCA059FC4}" type="datetimeFigureOut">
               <a:rPr lang="en-US" smtClean="0"/>
-              <a:t>6/10/2026</a:t>
+              <a:t>6/11/2026</a:t>
             </a:fld>
             <a:endParaRPr lang="en-US"/>
           </a:p>
@@ -2514,7 +2512,7 @@
           <a:p>
             <a:fld id="{5BCAD085-E8A6-8845-BD4E-CB4CCA059FC4}" type="datetimeFigureOut">
               <a:rPr lang="en-US" smtClean="0"/>
-              <a:t>6/10/2026</a:t>
+              <a:t>6/11/2026</a:t>
             </a:fld>
             <a:endParaRPr lang="en-US"/>
           </a:p>
@@ -2725,7 +2723,7 @@
           <a:p>
             <a:fld id="{5BCAD085-E8A6-8845-BD4E-CB4CCA059FC4}" type="datetimeFigureOut">
               <a:rPr lang="en-US" smtClean="0"/>
-              <a:t>6/10/2026</a:t>
+              <a:t>6/11/2026</a:t>
             </a:fld>
             <a:endParaRPr lang="en-US"/>
           </a:p>
@@ -3256,8 +3254,8 @@
         </p:nvSpPr>
         <p:spPr>
           <a:xfrm>
-            <a:off x="502920" y="685800"/>
-            <a:ext cx="6583680" cy="5486400"/>
+            <a:off x="502919" y="685800"/>
+            <a:ext cx="8727331" cy="5486400"/>
           </a:xfrm>
           <a:prstGeom prst="roundRect">
             <a:avLst/>
@@ -3417,7 +3415,7 @@
         <p:spPr>
           <a:xfrm>
             <a:off x="868680" y="2743200"/>
-            <a:ext cx="5852160" cy="615553"/>
+            <a:ext cx="7076248" cy="615553"/>
           </a:xfrm>
           <a:prstGeom prst="rect">
             <a:avLst/>
@@ -3509,137 +3507,18 @@
               <a:t>конфиг</a:t>
             </a:r>
             <a:r>
-              <a:rPr dirty="0"/>
+              <a:rPr lang="ru-RU" dirty="0" err="1"/>
+              <a:t>урируемые</a:t>
+            </a:r>
+            <a:r>
+              <a:rPr lang="ru-RU" dirty="0"/>
               <a:t> </a:t>
             </a:r>
             <a:r>
-              <a:rPr dirty="0" err="1"/>
-              <a:t>без</a:t>
-            </a:r>
-            <a:r>
-              <a:rPr dirty="0"/>
-              <a:t> </a:t>
-            </a:r>
-            <a:r>
-              <a:rPr dirty="0" err="1"/>
-              <a:t>релиза</a:t>
+              <a:rPr lang="ru-RU" dirty="0" err="1"/>
+              <a:t>сценарции</a:t>
             </a:r>
             <a:endParaRPr dirty="0"/>
-          </a:p>
-        </p:txBody>
-      </p:sp>
-      <p:sp>
-        <p:nvSpPr>
-          <p:cNvPr id="10" name="Rounded Rectangle 9"/>
-          <p:cNvSpPr/>
-          <p:nvPr/>
-        </p:nvSpPr>
-        <p:spPr>
-          <a:xfrm>
-            <a:off x="7406640" y="685800"/>
-            <a:ext cx="4251960" cy="2560320"/>
-          </a:xfrm>
-          <a:prstGeom prst="roundRect">
-            <a:avLst/>
-          </a:prstGeom>
-          <a:solidFill>
-            <a:srgbClr val="0A0E18"/>
-          </a:solidFill>
-          <a:ln w="12700">
-            <a:solidFill>
-              <a:srgbClr val="3A4558"/>
-            </a:solidFill>
-          </a:ln>
-        </p:spPr>
-        <p:style>
-          <a:lnRef idx="1">
-            <a:schemeClr val="accent1"/>
-          </a:lnRef>
-          <a:fillRef idx="3">
-            <a:schemeClr val="accent1"/>
-          </a:fillRef>
-          <a:effectRef idx="2">
-            <a:schemeClr val="accent1"/>
-          </a:effectRef>
-          <a:fontRef idx="minor">
-            <a:schemeClr val="lt1"/>
-          </a:fontRef>
-        </p:style>
-        <p:txBody>
-          <a:bodyPr rtlCol="0" anchor="ctr"/>
-          <a:lstStyle/>
-          <a:p>
-            <a:pPr algn="ctr"/>
-            <a:endParaRPr/>
-          </a:p>
-        </p:txBody>
-      </p:sp>
-      <p:sp>
-        <p:nvSpPr>
-          <p:cNvPr id="11" name="Rounded Rectangle 10"/>
-          <p:cNvSpPr/>
-          <p:nvPr/>
-        </p:nvSpPr>
-        <p:spPr>
-          <a:xfrm>
-            <a:off x="7589520" y="914400"/>
-            <a:ext cx="3886200" cy="475488"/>
-          </a:xfrm>
-          <a:prstGeom prst="roundRect">
-            <a:avLst/>
-          </a:prstGeom>
-          <a:solidFill>
-            <a:srgbClr val="3D3420"/>
-          </a:solidFill>
-          <a:ln w="19050">
-            <a:solidFill>
-              <a:srgbClr val="D4A84B"/>
-            </a:solidFill>
-          </a:ln>
-        </p:spPr>
-        <p:style>
-          <a:lnRef idx="1">
-            <a:schemeClr val="accent1"/>
-          </a:lnRef>
-          <a:fillRef idx="3">
-            <a:schemeClr val="accent1"/>
-          </a:fillRef>
-          <a:effectRef idx="2">
-            <a:schemeClr val="accent1"/>
-          </a:effectRef>
-          <a:fontRef idx="minor">
-            <a:schemeClr val="lt1"/>
-          </a:fontRef>
-        </p:style>
-        <p:txBody>
-          <a:bodyPr wrap="square" lIns="101600" rIns="101600" rtlCol="0" anchor="ctr"/>
-          <a:lstStyle/>
-          <a:p>
-            <a:pPr algn="ctr">
-              <a:defRPr sz="1000" b="1">
-                <a:solidFill>
-                  <a:srgbClr val="E8EAED"/>
-                </a:solidFill>
-              </a:defRPr>
-            </a:pPr>
-            <a:r>
-              <a:t>Staff Admin</a:t>
-            </a:r>
-          </a:p>
-          <a:p>
-            <a:pPr algn="ctr">
-              <a:spcBef>
-                <a:spcPts val="300"/>
-              </a:spcBef>
-              <a:defRPr sz="700">
-                <a:solidFill>
-                  <a:srgbClr val="9CA3AF"/>
-                </a:solidFill>
-              </a:defRPr>
-            </a:pPr>
-            <a:r>
-              <a:t>конфиг</a:t>
-            </a:r>
           </a:p>
         </p:txBody>
       </p:sp>
@@ -3678,75 +3557,6 @@
           </a:fontRef>
         </p:style>
       </p:cxnSp>
-      <p:sp>
-        <p:nvSpPr>
-          <p:cNvPr id="13" name="Rounded Rectangle 12"/>
-          <p:cNvSpPr/>
-          <p:nvPr/>
-        </p:nvSpPr>
-        <p:spPr>
-          <a:xfrm>
-            <a:off x="7589520" y="1737360"/>
-            <a:ext cx="3886200" cy="475488"/>
-          </a:xfrm>
-          <a:prstGeom prst="roundRect">
-            <a:avLst/>
-          </a:prstGeom>
-          <a:solidFill>
-            <a:srgbClr val="1E2A3D"/>
-          </a:solidFill>
-          <a:ln w="19050">
-            <a:solidFill>
-              <a:srgbClr val="5B8DEF"/>
-            </a:solidFill>
-          </a:ln>
-        </p:spPr>
-        <p:style>
-          <a:lnRef idx="1">
-            <a:schemeClr val="accent1"/>
-          </a:lnRef>
-          <a:fillRef idx="3">
-            <a:schemeClr val="accent1"/>
-          </a:fillRef>
-          <a:effectRef idx="2">
-            <a:schemeClr val="accent1"/>
-          </a:effectRef>
-          <a:fontRef idx="minor">
-            <a:schemeClr val="lt1"/>
-          </a:fontRef>
-        </p:style>
-        <p:txBody>
-          <a:bodyPr wrap="square" lIns="101600" rIns="101600" rtlCol="0" anchor="ctr"/>
-          <a:lstStyle/>
-          <a:p>
-            <a:pPr algn="ctr">
-              <a:defRPr sz="1000" b="1">
-                <a:solidFill>
-                  <a:srgbClr val="E8EAED"/>
-                </a:solidFill>
-              </a:defRPr>
-            </a:pPr>
-            <a:r>
-              <a:t>Django Server</a:t>
-            </a:r>
-          </a:p>
-          <a:p>
-            <a:pPr algn="ctr">
-              <a:spcBef>
-                <a:spcPts val="300"/>
-              </a:spcBef>
-              <a:defRPr sz="700">
-                <a:solidFill>
-                  <a:srgbClr val="9CA3AF"/>
-                </a:solidFill>
-              </a:defRPr>
-            </a:pPr>
-            <a:r>
-              <a:t>API + хранилище</a:t>
-            </a:r>
-          </a:p>
-        </p:txBody>
-      </p:sp>
       <p:cxnSp>
         <p:nvCxnSpPr>
           <p:cNvPr id="14" name="Connector 13"/>
@@ -3782,75 +3592,6 @@
           </a:fontRef>
         </p:style>
       </p:cxnSp>
-      <p:sp>
-        <p:nvSpPr>
-          <p:cNvPr id="15" name="Rounded Rectangle 14"/>
-          <p:cNvSpPr/>
-          <p:nvPr/>
-        </p:nvSpPr>
-        <p:spPr>
-          <a:xfrm>
-            <a:off x="7589520" y="2560320"/>
-            <a:ext cx="3886200" cy="475488"/>
-          </a:xfrm>
-          <a:prstGeom prst="roundRect">
-            <a:avLst/>
-          </a:prstGeom>
-          <a:solidFill>
-            <a:srgbClr val="2A2438"/>
-          </a:solidFill>
-          <a:ln w="19050">
-            <a:solidFill>
-              <a:srgbClr val="9B7ED0"/>
-            </a:solidFill>
-          </a:ln>
-        </p:spPr>
-        <p:style>
-          <a:lnRef idx="1">
-            <a:schemeClr val="accent1"/>
-          </a:lnRef>
-          <a:fillRef idx="3">
-            <a:schemeClr val="accent1"/>
-          </a:fillRef>
-          <a:effectRef idx="2">
-            <a:schemeClr val="accent1"/>
-          </a:effectRef>
-          <a:fontRef idx="minor">
-            <a:schemeClr val="lt1"/>
-          </a:fontRef>
-        </p:style>
-        <p:txBody>
-          <a:bodyPr wrap="square" lIns="101600" rIns="101600" rtlCol="0" anchor="ctr"/>
-          <a:lstStyle/>
-          <a:p>
-            <a:pPr algn="ctr">
-              <a:defRPr sz="1000" b="1">
-                <a:solidFill>
-                  <a:srgbClr val="E8EAED"/>
-                </a:solidFill>
-              </a:defRPr>
-            </a:pPr>
-            <a:r>
-              <a:t>Flutter App</a:t>
-            </a:r>
-          </a:p>
-          <a:p>
-            <a:pPr algn="ctr">
-              <a:spcBef>
-                <a:spcPts val="300"/>
-              </a:spcBef>
-              <a:defRPr sz="700">
-                <a:solidFill>
-                  <a:srgbClr val="9CA3AF"/>
-                </a:solidFill>
-              </a:defRPr>
-            </a:pPr>
-            <a:r>
-              <a:t>сбор</a:t>
-            </a:r>
-          </a:p>
-        </p:txBody>
-      </p:sp>
       <p:cxnSp>
         <p:nvCxnSpPr>
           <p:cNvPr id="16" name="Connector 15"/>
@@ -3886,75 +3627,6 @@
           </a:fontRef>
         </p:style>
       </p:cxnSp>
-      <p:sp>
-        <p:nvSpPr>
-          <p:cNvPr id="17" name="Rounded Rectangle 16"/>
-          <p:cNvSpPr/>
-          <p:nvPr/>
-        </p:nvSpPr>
-        <p:spPr>
-          <a:xfrm>
-            <a:off x="7589520" y="3383280"/>
-            <a:ext cx="3886200" cy="475488"/>
-          </a:xfrm>
-          <a:prstGeom prst="roundRect">
-            <a:avLst/>
-          </a:prstGeom>
-          <a:solidFill>
-            <a:srgbClr val="1A2E28"/>
-          </a:solidFill>
-          <a:ln w="19050">
-            <a:solidFill>
-              <a:srgbClr val="3DCC85"/>
-            </a:solidFill>
-          </a:ln>
-        </p:spPr>
-        <p:style>
-          <a:lnRef idx="1">
-            <a:schemeClr val="accent1"/>
-          </a:lnRef>
-          <a:fillRef idx="3">
-            <a:schemeClr val="accent1"/>
-          </a:fillRef>
-          <a:effectRef idx="2">
-            <a:schemeClr val="accent1"/>
-          </a:effectRef>
-          <a:fontRef idx="minor">
-            <a:schemeClr val="lt1"/>
-          </a:fontRef>
-        </p:style>
-        <p:txBody>
-          <a:bodyPr wrap="square" lIns="101600" rIns="101600" rtlCol="0" anchor="ctr"/>
-          <a:lstStyle/>
-          <a:p>
-            <a:pPr algn="ctr">
-              <a:defRPr sz="1000" b="1">
-                <a:solidFill>
-                  <a:srgbClr val="E8EAED"/>
-                </a:solidFill>
-              </a:defRPr>
-            </a:pPr>
-            <a:r>
-              <a:t>Admin UI</a:t>
-            </a:r>
-          </a:p>
-          <a:p>
-            <a:pPr algn="ctr">
-              <a:spcBef>
-                <a:spcPts val="300"/>
-              </a:spcBef>
-              <a:defRPr sz="700">
-                <a:solidFill>
-                  <a:srgbClr val="9CA3AF"/>
-                </a:solidFill>
-              </a:defRPr>
-            </a:pPr>
-            <a:r>
-              <a:t>пакеты</a:t>
-            </a:r>
-          </a:p>
-        </p:txBody>
-      </p:sp>
       <p:cxnSp>
         <p:nvCxnSpPr>
           <p:cNvPr id="18" name="Connector 17"/>
@@ -3991,2404 +3663,6 @@
           </a:fontRef>
         </p:style>
       </p:cxnSp>
-      <p:sp>
-        <p:nvSpPr>
-          <p:cNvPr id="19" name="Rounded Rectangle 18"/>
-          <p:cNvSpPr/>
-          <p:nvPr/>
-        </p:nvSpPr>
-        <p:spPr>
-          <a:xfrm>
-            <a:off x="7406640" y="3383280"/>
-            <a:ext cx="4251960" cy="2788920"/>
-          </a:xfrm>
-          <a:prstGeom prst="roundRect">
-            <a:avLst/>
-          </a:prstGeom>
-          <a:solidFill>
-            <a:srgbClr val="1A202C"/>
-          </a:solidFill>
-          <a:ln w="12700">
-            <a:solidFill>
-              <a:srgbClr val="5B8DEF"/>
-            </a:solidFill>
-          </a:ln>
-        </p:spPr>
-        <p:style>
-          <a:lnRef idx="1">
-            <a:schemeClr val="accent1"/>
-          </a:lnRef>
-          <a:fillRef idx="3">
-            <a:schemeClr val="accent1"/>
-          </a:fillRef>
-          <a:effectRef idx="2">
-            <a:schemeClr val="accent1"/>
-          </a:effectRef>
-          <a:fontRef idx="minor">
-            <a:schemeClr val="lt1"/>
-          </a:fontRef>
-        </p:style>
-        <p:txBody>
-          <a:bodyPr rtlCol="0" anchor="ctr"/>
-          <a:lstStyle/>
-          <a:p>
-            <a:pPr algn="ctr"/>
-            <a:endParaRPr/>
-          </a:p>
-        </p:txBody>
-      </p:sp>
-      <p:sp>
-        <p:nvSpPr>
-          <p:cNvPr id="20" name="Rounded Rectangle 19"/>
-          <p:cNvSpPr/>
-          <p:nvPr/>
-        </p:nvSpPr>
-        <p:spPr>
-          <a:xfrm>
-            <a:off x="7498080" y="3474720"/>
-            <a:ext cx="4069080" cy="2606040"/>
-          </a:xfrm>
-          <a:prstGeom prst="roundRect">
-            <a:avLst/>
-          </a:prstGeom>
-          <a:solidFill>
-            <a:srgbClr val="182030"/>
-          </a:solidFill>
-          <a:ln w="12700">
-            <a:solidFill>
-              <a:srgbClr val="3A4558"/>
-            </a:solidFill>
-          </a:ln>
-        </p:spPr>
-        <p:style>
-          <a:lnRef idx="1">
-            <a:schemeClr val="accent1"/>
-          </a:lnRef>
-          <a:fillRef idx="3">
-            <a:schemeClr val="accent1"/>
-          </a:fillRef>
-          <a:effectRef idx="2">
-            <a:schemeClr val="accent1"/>
-          </a:effectRef>
-          <a:fontRef idx="minor">
-            <a:schemeClr val="lt1"/>
-          </a:fontRef>
-        </p:style>
-        <p:txBody>
-          <a:bodyPr rtlCol="0" anchor="ctr"/>
-          <a:lstStyle/>
-          <a:p>
-            <a:pPr algn="ctr">
-              <a:defRPr sz="1000">
-                <a:solidFill>
-                  <a:srgbClr val="9CA3AF"/>
-                </a:solidFill>
-              </a:defRPr>
-            </a:pPr>
-            <a:r>
-              <a:t>hero — админка + телефон</a:t>
-            </a:r>
-          </a:p>
-        </p:txBody>
-      </p:sp>
-      <p:sp>
-        <p:nvSpPr>
-          <p:cNvPr id="21" name="Rounded Rectangle 20"/>
-          <p:cNvSpPr/>
-          <p:nvPr/>
-        </p:nvSpPr>
-        <p:spPr>
-          <a:xfrm>
-            <a:off x="10652760" y="3456432"/>
-            <a:ext cx="914400" cy="219456"/>
-          </a:xfrm>
-          <a:prstGeom prst="roundRect">
-            <a:avLst/>
-          </a:prstGeom>
-          <a:solidFill>
-            <a:srgbClr val="5B8DEF"/>
-          </a:solidFill>
-          <a:ln>
-            <a:noFill/>
-          </a:ln>
-        </p:spPr>
-        <p:style>
-          <a:lnRef idx="1">
-            <a:schemeClr val="accent1"/>
-          </a:lnRef>
-          <a:fillRef idx="3">
-            <a:schemeClr val="accent1"/>
-          </a:fillRef>
-          <a:effectRef idx="2">
-            <a:schemeClr val="accent1"/>
-          </a:effectRef>
-          <a:fontRef idx="minor">
-            <a:schemeClr val="lt1"/>
-          </a:fontRef>
-        </p:style>
-        <p:txBody>
-          <a:bodyPr rtlCol="0" anchor="ctr"/>
-          <a:lstStyle/>
-          <a:p>
-            <a:pPr algn="ctr">
-              <a:defRPr sz="600" b="1">
-                <a:solidFill>
-                  <a:srgbClr val="E8EAED"/>
-                </a:solidFill>
-              </a:defRPr>
-            </a:pPr>
-            <a:r>
-              <a:t>SCREENSHOT</a:t>
-            </a:r>
-          </a:p>
-        </p:txBody>
-      </p:sp>
-    </p:spTree>
-  </p:cSld>
-  <p:clrMapOvr>
-    <a:masterClrMapping/>
-  </p:clrMapOvr>
-</p:sld>
-</file>
-
-<file path=ppt/slides/slide10.xml><?xml version="1.0" encoding="utf-8"?>
-<p:sld xmlns:a="http://schemas.openxmlformats.org/drawingml/2006/main" xmlns:r="http://schemas.openxmlformats.org/officeDocument/2006/relationships" xmlns:p="http://schemas.openxmlformats.org/presentationml/2006/main">
-  <p:cSld>
-    <p:bg>
-      <p:bgPr>
-        <a:gradFill rotWithShape="1">
-          <a:gsLst>
-            <a:gs pos="0">
-              <a:srgbClr val="0A0E18"/>
-            </a:gs>
-            <a:gs pos="100000">
-              <a:srgbClr val="182030"/>
-            </a:gs>
-          </a:gsLst>
-          <a:lin ang="13500000" scaled="0"/>
-        </a:gradFill>
-        <a:effectLst/>
-      </p:bgPr>
-    </p:bg>
-    <p:spTree>
-      <p:nvGrpSpPr>
-        <p:cNvPr id="1" name=""/>
-        <p:cNvGrpSpPr/>
-        <p:nvPr/>
-      </p:nvGrpSpPr>
-      <p:grpSpPr>
-        <a:xfrm>
-          <a:off x="0" y="0"/>
-          <a:ext cx="0" cy="0"/>
-          <a:chOff x="0" y="0"/>
-          <a:chExt cx="0" cy="0"/>
-        </a:xfrm>
-      </p:grpSpPr>
-      <p:sp>
-        <p:nvSpPr>
-          <p:cNvPr id="2" name="Oval 1"/>
-          <p:cNvSpPr/>
-          <p:nvPr/>
-        </p:nvSpPr>
-        <p:spPr>
-          <a:xfrm>
-            <a:off x="-1097280" y="-914400"/>
-            <a:ext cx="3200400" cy="3200400"/>
-          </a:xfrm>
-          <a:prstGeom prst="ellipse">
-            <a:avLst/>
-          </a:prstGeom>
-          <a:solidFill>
-            <a:srgbClr val="3A5A9E"/>
-          </a:solidFill>
-          <a:ln>
-            <a:noFill/>
-          </a:ln>
-        </p:spPr>
-        <p:style>
-          <a:lnRef idx="1">
-            <a:schemeClr val="accent1"/>
-          </a:lnRef>
-          <a:fillRef idx="3">
-            <a:schemeClr val="accent1"/>
-          </a:fillRef>
-          <a:effectRef idx="2">
-            <a:schemeClr val="accent1"/>
-          </a:effectRef>
-          <a:fontRef idx="minor">
-            <a:schemeClr val="lt1"/>
-          </a:fontRef>
-        </p:style>
-        <p:txBody>
-          <a:bodyPr rtlCol="0" anchor="ctr"/>
-          <a:lstStyle/>
-          <a:p>
-            <a:pPr algn="ctr"/>
-            <a:endParaRPr/>
-          </a:p>
-        </p:txBody>
-      </p:sp>
-      <p:sp>
-        <p:nvSpPr>
-          <p:cNvPr id="3" name="Oval 2"/>
-          <p:cNvSpPr/>
-          <p:nvPr/>
-        </p:nvSpPr>
-        <p:spPr>
-          <a:xfrm>
-            <a:off x="10515600" y="5303520"/>
-            <a:ext cx="2560320" cy="2560320"/>
-          </a:xfrm>
-          <a:prstGeom prst="ellipse">
-            <a:avLst/>
-          </a:prstGeom>
-          <a:solidFill>
-            <a:srgbClr val="2A3550"/>
-          </a:solidFill>
-          <a:ln>
-            <a:noFill/>
-          </a:ln>
-        </p:spPr>
-        <p:style>
-          <a:lnRef idx="1">
-            <a:schemeClr val="accent1"/>
-          </a:lnRef>
-          <a:fillRef idx="3">
-            <a:schemeClr val="accent1"/>
-          </a:fillRef>
-          <a:effectRef idx="2">
-            <a:schemeClr val="accent1"/>
-          </a:effectRef>
-          <a:fontRef idx="minor">
-            <a:schemeClr val="lt1"/>
-          </a:fontRef>
-        </p:style>
-        <p:txBody>
-          <a:bodyPr rtlCol="0" anchor="ctr"/>
-          <a:lstStyle/>
-          <a:p>
-            <a:pPr algn="ctr"/>
-            <a:endParaRPr/>
-          </a:p>
-        </p:txBody>
-      </p:sp>
-      <p:sp>
-        <p:nvSpPr>
-          <p:cNvPr id="4" name="Rectangle 3"/>
-          <p:cNvSpPr/>
-          <p:nvPr/>
-        </p:nvSpPr>
-        <p:spPr>
-          <a:xfrm>
-            <a:off x="0" y="0"/>
-            <a:ext cx="12191695" cy="54864"/>
-          </a:xfrm>
-          <a:prstGeom prst="rect">
-            <a:avLst/>
-          </a:prstGeom>
-          <a:solidFill>
-            <a:srgbClr val="3DCC85"/>
-          </a:solidFill>
-          <a:ln>
-            <a:noFill/>
-          </a:ln>
-        </p:spPr>
-        <p:style>
-          <a:lnRef idx="1">
-            <a:schemeClr val="accent1"/>
-          </a:lnRef>
-          <a:fillRef idx="3">
-            <a:schemeClr val="accent1"/>
-          </a:fillRef>
-          <a:effectRef idx="2">
-            <a:schemeClr val="accent1"/>
-          </a:effectRef>
-          <a:fontRef idx="minor">
-            <a:schemeClr val="lt1"/>
-          </a:fontRef>
-        </p:style>
-        <p:txBody>
-          <a:bodyPr rtlCol="0" anchor="ctr"/>
-          <a:lstStyle/>
-          <a:p>
-            <a:pPr algn="ctr"/>
-            <a:endParaRPr/>
-          </a:p>
-        </p:txBody>
-      </p:sp>
-      <p:sp>
-        <p:nvSpPr>
-          <p:cNvPr id="5" name="Rectangle 4"/>
-          <p:cNvSpPr/>
-          <p:nvPr/>
-        </p:nvSpPr>
-        <p:spPr>
-          <a:xfrm>
-            <a:off x="0" y="6565392"/>
-            <a:ext cx="12191695" cy="292608"/>
-          </a:xfrm>
-          <a:prstGeom prst="rect">
-            <a:avLst/>
-          </a:prstGeom>
-          <a:solidFill>
-            <a:srgbClr val="0A0E18"/>
-          </a:solidFill>
-          <a:ln>
-            <a:noFill/>
-          </a:ln>
-        </p:spPr>
-        <p:style>
-          <a:lnRef idx="1">
-            <a:schemeClr val="accent1"/>
-          </a:lnRef>
-          <a:fillRef idx="3">
-            <a:schemeClr val="accent1"/>
-          </a:fillRef>
-          <a:effectRef idx="2">
-            <a:schemeClr val="accent1"/>
-          </a:effectRef>
-          <a:fontRef idx="minor">
-            <a:schemeClr val="lt1"/>
-          </a:fontRef>
-        </p:style>
-        <p:txBody>
-          <a:bodyPr rtlCol="0" anchor="ctr"/>
-          <a:lstStyle/>
-          <a:p>
-            <a:pPr algn="ctr"/>
-            <a:endParaRPr/>
-          </a:p>
-        </p:txBody>
-      </p:sp>
-      <p:sp>
-        <p:nvSpPr>
-          <p:cNvPr id="6" name="TextBox 5"/>
-          <p:cNvSpPr txBox="1"/>
-          <p:nvPr/>
-        </p:nvSpPr>
-        <p:spPr>
-          <a:xfrm>
-            <a:off x="594360" y="6583680"/>
-            <a:ext cx="3657600" cy="256032"/>
-          </a:xfrm>
-          <a:prstGeom prst="rect">
-            <a:avLst/>
-          </a:prstGeom>
-          <a:noFill/>
-        </p:spPr>
-        <p:txBody>
-          <a:bodyPr wrap="square" anchor="t">
-            <a:spAutoFit/>
-          </a:bodyPr>
-          <a:lstStyle/>
-          <a:p>
-            <a:pPr algn="l">
-              <a:defRPr sz="900" b="0">
-                <a:solidFill>
-                  <a:srgbClr val="6B7280"/>
-                </a:solidFill>
-              </a:defRPr>
-            </a:pPr>
-            <a:r>
-              <a:t>Data Collector  ·  Epoch8</a:t>
-            </a:r>
-          </a:p>
-        </p:txBody>
-      </p:sp>
-      <p:sp>
-        <p:nvSpPr>
-          <p:cNvPr id="7" name="TextBox 6"/>
-          <p:cNvSpPr txBox="1"/>
-          <p:nvPr/>
-        </p:nvSpPr>
-        <p:spPr>
-          <a:xfrm>
-            <a:off x="10972800" y="6583680"/>
-            <a:ext cx="822960" cy="256032"/>
-          </a:xfrm>
-          <a:prstGeom prst="rect">
-            <a:avLst/>
-          </a:prstGeom>
-          <a:noFill/>
-        </p:spPr>
-        <p:txBody>
-          <a:bodyPr wrap="square" anchor="t">
-            <a:spAutoFit/>
-          </a:bodyPr>
-          <a:lstStyle/>
-          <a:p>
-            <a:pPr algn="r">
-              <a:defRPr sz="900" b="0">
-                <a:solidFill>
-                  <a:srgbClr val="6B7280"/>
-                </a:solidFill>
-              </a:defRPr>
-            </a:pPr>
-            <a:r>
-              <a:t>10 / 11</a:t>
-            </a:r>
-          </a:p>
-        </p:txBody>
-      </p:sp>
-      <p:sp>
-        <p:nvSpPr>
-          <p:cNvPr id="8" name="Rounded Rectangle 7"/>
-          <p:cNvSpPr/>
-          <p:nvPr/>
-        </p:nvSpPr>
-        <p:spPr>
-          <a:xfrm>
-            <a:off x="594360" y="411480"/>
-            <a:ext cx="1645920" cy="292608"/>
-          </a:xfrm>
-          <a:prstGeom prst="roundRect">
-            <a:avLst/>
-          </a:prstGeom>
-          <a:solidFill>
-            <a:srgbClr val="1E2A3D"/>
-          </a:solidFill>
-          <a:ln w="12700">
-            <a:solidFill>
-              <a:srgbClr val="3DCC85"/>
-            </a:solidFill>
-          </a:ln>
-        </p:spPr>
-        <p:style>
-          <a:lnRef idx="1">
-            <a:schemeClr val="accent1"/>
-          </a:lnRef>
-          <a:fillRef idx="3">
-            <a:schemeClr val="accent1"/>
-          </a:fillRef>
-          <a:effectRef idx="2">
-            <a:schemeClr val="accent1"/>
-          </a:effectRef>
-          <a:fontRef idx="minor">
-            <a:schemeClr val="lt1"/>
-          </a:fontRef>
-        </p:style>
-        <p:txBody>
-          <a:bodyPr rtlCol="0" anchor="ctr"/>
-          <a:lstStyle/>
-          <a:p>
-            <a:pPr algn="ctr">
-              <a:defRPr sz="900" b="1">
-                <a:solidFill>
-                  <a:srgbClr val="3DCC85"/>
-                </a:solidFill>
-              </a:defRPr>
-            </a:pPr>
-            <a:r>
-              <a:t>STEP 04</a:t>
-            </a:r>
-          </a:p>
-        </p:txBody>
-      </p:sp>
-      <p:sp>
-        <p:nvSpPr>
-          <p:cNvPr id="9" name="Oval 8"/>
-          <p:cNvSpPr/>
-          <p:nvPr/>
-        </p:nvSpPr>
-        <p:spPr>
-          <a:xfrm>
-            <a:off x="594360" y="347472"/>
-            <a:ext cx="457200" cy="457200"/>
-          </a:xfrm>
-          <a:prstGeom prst="ellipse">
-            <a:avLst/>
-          </a:prstGeom>
-          <a:solidFill>
-            <a:srgbClr val="3DCC85"/>
-          </a:solidFill>
-          <a:ln>
-            <a:noFill/>
-          </a:ln>
-        </p:spPr>
-        <p:style>
-          <a:lnRef idx="1">
-            <a:schemeClr val="accent1"/>
-          </a:lnRef>
-          <a:fillRef idx="3">
-            <a:schemeClr val="accent1"/>
-          </a:fillRef>
-          <a:effectRef idx="2">
-            <a:schemeClr val="accent1"/>
-          </a:effectRef>
-          <a:fontRef idx="minor">
-            <a:schemeClr val="lt1"/>
-          </a:fontRef>
-        </p:style>
-        <p:txBody>
-          <a:bodyPr rtlCol="0" anchor="ctr"/>
-          <a:lstStyle/>
-          <a:p>
-            <a:pPr algn="ctr">
-              <a:defRPr sz="1500" b="1">
-                <a:solidFill>
-                  <a:srgbClr val="121218"/>
-                </a:solidFill>
-              </a:defRPr>
-            </a:pPr>
-            <a:r>
-              <a:t>4</a:t>
-            </a:r>
-          </a:p>
-        </p:txBody>
-      </p:sp>
-      <p:sp>
-        <p:nvSpPr>
-          <p:cNvPr id="10" name="TextBox 9"/>
-          <p:cNvSpPr txBox="1"/>
-          <p:nvPr/>
-        </p:nvSpPr>
-        <p:spPr>
-          <a:xfrm>
-            <a:off x="594360" y="777240"/>
-            <a:ext cx="10058400" cy="685800"/>
-          </a:xfrm>
-          <a:prstGeom prst="rect">
-            <a:avLst/>
-          </a:prstGeom>
-          <a:noFill/>
-        </p:spPr>
-        <p:txBody>
-          <a:bodyPr wrap="square" anchor="t">
-            <a:spAutoFit/>
-          </a:bodyPr>
-          <a:lstStyle/>
-          <a:p>
-            <a:pPr algn="l">
-              <a:defRPr sz="3000" b="1">
-                <a:solidFill>
-                  <a:srgbClr val="E8EAED"/>
-                </a:solidFill>
-              </a:defRPr>
-            </a:pPr>
-            <a:r>
-              <a:t>Просмотр принятых пакетов</a:t>
-            </a:r>
-          </a:p>
-        </p:txBody>
-      </p:sp>
-      <p:sp>
-        <p:nvSpPr>
-          <p:cNvPr id="11" name="Rectangle 10"/>
-          <p:cNvSpPr/>
-          <p:nvPr/>
-        </p:nvSpPr>
-        <p:spPr>
-          <a:xfrm>
-            <a:off x="594360" y="1490472"/>
-            <a:ext cx="2011680" cy="45720"/>
-          </a:xfrm>
-          <a:prstGeom prst="rect">
-            <a:avLst/>
-          </a:prstGeom>
-          <a:solidFill>
-            <a:srgbClr val="5B8DEF"/>
-          </a:solidFill>
-          <a:ln>
-            <a:noFill/>
-          </a:ln>
-        </p:spPr>
-        <p:style>
-          <a:lnRef idx="1">
-            <a:schemeClr val="accent1"/>
-          </a:lnRef>
-          <a:fillRef idx="3">
-            <a:schemeClr val="accent1"/>
-          </a:fillRef>
-          <a:effectRef idx="2">
-            <a:schemeClr val="accent1"/>
-          </a:effectRef>
-          <a:fontRef idx="minor">
-            <a:schemeClr val="lt1"/>
-          </a:fontRef>
-        </p:style>
-        <p:txBody>
-          <a:bodyPr rtlCol="0" anchor="ctr"/>
-          <a:lstStyle/>
-          <a:p>
-            <a:pPr algn="ctr"/>
-            <a:endParaRPr/>
-          </a:p>
-        </p:txBody>
-      </p:sp>
-      <p:sp>
-        <p:nvSpPr>
-          <p:cNvPr id="12" name="TextBox 11"/>
-          <p:cNvSpPr txBox="1"/>
-          <p:nvPr/>
-        </p:nvSpPr>
-        <p:spPr>
-          <a:xfrm>
-            <a:off x="594360" y="1645920"/>
-            <a:ext cx="10058400" cy="411480"/>
-          </a:xfrm>
-          <a:prstGeom prst="rect">
-            <a:avLst/>
-          </a:prstGeom>
-          <a:noFill/>
-        </p:spPr>
-        <p:txBody>
-          <a:bodyPr wrap="square" anchor="t">
-            <a:spAutoFit/>
-          </a:bodyPr>
-          <a:lstStyle/>
-          <a:p>
-            <a:pPr algn="l">
-              <a:defRPr sz="1300" b="0">
-                <a:solidFill>
-                  <a:srgbClr val="9CA3AF"/>
-                </a:solidFill>
-              </a:defRPr>
-            </a:pPr>
-            <a:r>
-              <a:t>Админка: список → фильтр → workspace пакета</a:t>
-            </a:r>
-          </a:p>
-        </p:txBody>
-      </p:sp>
-      <p:sp>
-        <p:nvSpPr>
-          <p:cNvPr id="13" name="Rectangle 12"/>
-          <p:cNvSpPr/>
-          <p:nvPr/>
-        </p:nvSpPr>
-        <p:spPr>
-          <a:xfrm>
-            <a:off x="594360" y="1929383"/>
-            <a:ext cx="45720" cy="420624"/>
-          </a:xfrm>
-          <a:prstGeom prst="rect">
-            <a:avLst/>
-          </a:prstGeom>
-          <a:solidFill>
-            <a:srgbClr val="3DCC85"/>
-          </a:solidFill>
-          <a:ln>
-            <a:noFill/>
-          </a:ln>
-        </p:spPr>
-        <p:style>
-          <a:lnRef idx="1">
-            <a:schemeClr val="accent1"/>
-          </a:lnRef>
-          <a:fillRef idx="3">
-            <a:schemeClr val="accent1"/>
-          </a:fillRef>
-          <a:effectRef idx="2">
-            <a:schemeClr val="accent1"/>
-          </a:effectRef>
-          <a:fontRef idx="minor">
-            <a:schemeClr val="lt1"/>
-          </a:fontRef>
-        </p:style>
-        <p:txBody>
-          <a:bodyPr rtlCol="0" anchor="ctr"/>
-          <a:lstStyle/>
-          <a:p>
-            <a:pPr algn="ctr"/>
-            <a:endParaRPr/>
-          </a:p>
-        </p:txBody>
-      </p:sp>
-      <p:sp>
-        <p:nvSpPr>
-          <p:cNvPr id="14" name="Rounded Rectangle 13"/>
-          <p:cNvSpPr/>
-          <p:nvPr/>
-        </p:nvSpPr>
-        <p:spPr>
-          <a:xfrm>
-            <a:off x="667512" y="1874519"/>
-            <a:ext cx="5230368" cy="530352"/>
-          </a:xfrm>
-          <a:prstGeom prst="roundRect">
-            <a:avLst/>
-          </a:prstGeom>
-          <a:solidFill>
-            <a:srgbClr val="1E2A3D"/>
-          </a:solidFill>
-          <a:ln w="12700">
-            <a:solidFill>
-              <a:srgbClr val="3A4558"/>
-            </a:solidFill>
-          </a:ln>
-        </p:spPr>
-        <p:style>
-          <a:lnRef idx="1">
-            <a:schemeClr val="accent1"/>
-          </a:lnRef>
-          <a:fillRef idx="3">
-            <a:schemeClr val="accent1"/>
-          </a:fillRef>
-          <a:effectRef idx="2">
-            <a:schemeClr val="accent1"/>
-          </a:effectRef>
-          <a:fontRef idx="minor">
-            <a:schemeClr val="lt1"/>
-          </a:fontRef>
-        </p:style>
-        <p:txBody>
-          <a:bodyPr rtlCol="0" anchor="ctr"/>
-          <a:lstStyle/>
-          <a:p>
-            <a:pPr algn="ctr">
-              <a:defRPr sz="1300" b="0">
-                <a:solidFill>
-                  <a:srgbClr val="E8EAED"/>
-                </a:solidFill>
-              </a:defRPr>
-            </a:pPr>
-            <a:r>
-              <a:t>Список /ui/packages/ — все принятые пакеты проекта</a:t>
-            </a:r>
-          </a:p>
-        </p:txBody>
-      </p:sp>
-      <p:sp>
-        <p:nvSpPr>
-          <p:cNvPr id="15" name="Rectangle 14"/>
-          <p:cNvSpPr/>
-          <p:nvPr/>
-        </p:nvSpPr>
-        <p:spPr>
-          <a:xfrm>
-            <a:off x="594360" y="2532887"/>
-            <a:ext cx="45720" cy="420624"/>
-          </a:xfrm>
-          <a:prstGeom prst="rect">
-            <a:avLst/>
-          </a:prstGeom>
-          <a:solidFill>
-            <a:srgbClr val="3DCC85"/>
-          </a:solidFill>
-          <a:ln>
-            <a:noFill/>
-          </a:ln>
-        </p:spPr>
-        <p:style>
-          <a:lnRef idx="1">
-            <a:schemeClr val="accent1"/>
-          </a:lnRef>
-          <a:fillRef idx="3">
-            <a:schemeClr val="accent1"/>
-          </a:fillRef>
-          <a:effectRef idx="2">
-            <a:schemeClr val="accent1"/>
-          </a:effectRef>
-          <a:fontRef idx="minor">
-            <a:schemeClr val="lt1"/>
-          </a:fontRef>
-        </p:style>
-        <p:txBody>
-          <a:bodyPr rtlCol="0" anchor="ctr"/>
-          <a:lstStyle/>
-          <a:p>
-            <a:pPr algn="ctr"/>
-            <a:endParaRPr/>
-          </a:p>
-        </p:txBody>
-      </p:sp>
-      <p:sp>
-        <p:nvSpPr>
-          <p:cNvPr id="16" name="Rounded Rectangle 15"/>
-          <p:cNvSpPr/>
-          <p:nvPr/>
-        </p:nvSpPr>
-        <p:spPr>
-          <a:xfrm>
-            <a:off x="667512" y="2478023"/>
-            <a:ext cx="5230368" cy="530352"/>
-          </a:xfrm>
-          <a:prstGeom prst="roundRect">
-            <a:avLst/>
-          </a:prstGeom>
-          <a:solidFill>
-            <a:srgbClr val="1E2A3D"/>
-          </a:solidFill>
-          <a:ln w="12700">
-            <a:solidFill>
-              <a:srgbClr val="3A4558"/>
-            </a:solidFill>
-          </a:ln>
-        </p:spPr>
-        <p:style>
-          <a:lnRef idx="1">
-            <a:schemeClr val="accent1"/>
-          </a:lnRef>
-          <a:fillRef idx="3">
-            <a:schemeClr val="accent1"/>
-          </a:fillRef>
-          <a:effectRef idx="2">
-            <a:schemeClr val="accent1"/>
-          </a:effectRef>
-          <a:fontRef idx="minor">
-            <a:schemeClr val="lt1"/>
-          </a:fontRef>
-        </p:style>
-        <p:txBody>
-          <a:bodyPr rtlCol="0" anchor="ctr"/>
-          <a:lstStyle/>
-          <a:p>
-            <a:pPr algn="ctr">
-              <a:defRPr sz="1300" b="0">
-                <a:solidFill>
-                  <a:srgbClr val="E8EAED"/>
-                </a:solidFill>
-              </a:defRPr>
-            </a:pPr>
-            <a:r>
-              <a:t>Фильтры: проект, статус, поиск по полям</a:t>
-            </a:r>
-          </a:p>
-        </p:txBody>
-      </p:sp>
-      <p:sp>
-        <p:nvSpPr>
-          <p:cNvPr id="17" name="Rectangle 16"/>
-          <p:cNvSpPr/>
-          <p:nvPr/>
-        </p:nvSpPr>
-        <p:spPr>
-          <a:xfrm>
-            <a:off x="594360" y="3136391"/>
-            <a:ext cx="45720" cy="420624"/>
-          </a:xfrm>
-          <a:prstGeom prst="rect">
-            <a:avLst/>
-          </a:prstGeom>
-          <a:solidFill>
-            <a:srgbClr val="3DCC85"/>
-          </a:solidFill>
-          <a:ln>
-            <a:noFill/>
-          </a:ln>
-        </p:spPr>
-        <p:style>
-          <a:lnRef idx="1">
-            <a:schemeClr val="accent1"/>
-          </a:lnRef>
-          <a:fillRef idx="3">
-            <a:schemeClr val="accent1"/>
-          </a:fillRef>
-          <a:effectRef idx="2">
-            <a:schemeClr val="accent1"/>
-          </a:effectRef>
-          <a:fontRef idx="minor">
-            <a:schemeClr val="lt1"/>
-          </a:fontRef>
-        </p:style>
-        <p:txBody>
-          <a:bodyPr rtlCol="0" anchor="ctr"/>
-          <a:lstStyle/>
-          <a:p>
-            <a:pPr algn="ctr"/>
-            <a:endParaRPr/>
-          </a:p>
-        </p:txBody>
-      </p:sp>
-      <p:sp>
-        <p:nvSpPr>
-          <p:cNvPr id="18" name="Rounded Rectangle 17"/>
-          <p:cNvSpPr/>
-          <p:nvPr/>
-        </p:nvSpPr>
-        <p:spPr>
-          <a:xfrm>
-            <a:off x="667512" y="3081527"/>
-            <a:ext cx="5230368" cy="530352"/>
-          </a:xfrm>
-          <a:prstGeom prst="roundRect">
-            <a:avLst/>
-          </a:prstGeom>
-          <a:solidFill>
-            <a:srgbClr val="1E2A3D"/>
-          </a:solidFill>
-          <a:ln w="12700">
-            <a:solidFill>
-              <a:srgbClr val="3A4558"/>
-            </a:solidFill>
-          </a:ln>
-        </p:spPr>
-        <p:style>
-          <a:lnRef idx="1">
-            <a:schemeClr val="accent1"/>
-          </a:lnRef>
-          <a:fillRef idx="3">
-            <a:schemeClr val="accent1"/>
-          </a:fillRef>
-          <a:effectRef idx="2">
-            <a:schemeClr val="accent1"/>
-          </a:effectRef>
-          <a:fontRef idx="minor">
-            <a:schemeClr val="lt1"/>
-          </a:fontRef>
-        </p:style>
-        <p:txBody>
-          <a:bodyPr rtlCol="0" anchor="ctr"/>
-          <a:lstStyle/>
-          <a:p>
-            <a:pPr algn="ctr">
-              <a:defRPr sz="1300" b="0">
-                <a:solidFill>
-                  <a:srgbClr val="E8EAED"/>
-                </a:solidFill>
-              </a:defRPr>
-            </a:pPr>
-            <a:r>
-              <a:t>Workspace: данные · медиа · viz · история правок</a:t>
-            </a:r>
-          </a:p>
-        </p:txBody>
-      </p:sp>
-      <p:sp>
-        <p:nvSpPr>
-          <p:cNvPr id="19" name="Rectangle 18"/>
-          <p:cNvSpPr/>
-          <p:nvPr/>
-        </p:nvSpPr>
-        <p:spPr>
-          <a:xfrm>
-            <a:off x="594360" y="3739895"/>
-            <a:ext cx="45720" cy="420624"/>
-          </a:xfrm>
-          <a:prstGeom prst="rect">
-            <a:avLst/>
-          </a:prstGeom>
-          <a:solidFill>
-            <a:srgbClr val="3DCC85"/>
-          </a:solidFill>
-          <a:ln>
-            <a:noFill/>
-          </a:ln>
-        </p:spPr>
-        <p:style>
-          <a:lnRef idx="1">
-            <a:schemeClr val="accent1"/>
-          </a:lnRef>
-          <a:fillRef idx="3">
-            <a:schemeClr val="accent1"/>
-          </a:fillRef>
-          <a:effectRef idx="2">
-            <a:schemeClr val="accent1"/>
-          </a:effectRef>
-          <a:fontRef idx="minor">
-            <a:schemeClr val="lt1"/>
-          </a:fontRef>
-        </p:style>
-        <p:txBody>
-          <a:bodyPr rtlCol="0" anchor="ctr"/>
-          <a:lstStyle/>
-          <a:p>
-            <a:pPr algn="ctr"/>
-            <a:endParaRPr/>
-          </a:p>
-        </p:txBody>
-      </p:sp>
-      <p:sp>
-        <p:nvSpPr>
-          <p:cNvPr id="20" name="Rounded Rectangle 19"/>
-          <p:cNvSpPr/>
-          <p:nvPr/>
-        </p:nvSpPr>
-        <p:spPr>
-          <a:xfrm>
-            <a:off x="667512" y="3685031"/>
-            <a:ext cx="5230368" cy="530352"/>
-          </a:xfrm>
-          <a:prstGeom prst="roundRect">
-            <a:avLst/>
-          </a:prstGeom>
-          <a:solidFill>
-            <a:srgbClr val="1E2A3D"/>
-          </a:solidFill>
-          <a:ln w="12700">
-            <a:solidFill>
-              <a:srgbClr val="3A4558"/>
-            </a:solidFill>
-          </a:ln>
-        </p:spPr>
-        <p:style>
-          <a:lnRef idx="1">
-            <a:schemeClr val="accent1"/>
-          </a:lnRef>
-          <a:fillRef idx="3">
-            <a:schemeClr val="accent1"/>
-          </a:fillRef>
-          <a:effectRef idx="2">
-            <a:schemeClr val="accent1"/>
-          </a:effectRef>
-          <a:fontRef idx="minor">
-            <a:schemeClr val="lt1"/>
-          </a:fontRef>
-        </p:style>
-        <p:txBody>
-          <a:bodyPr rtlCol="0" anchor="ctr"/>
-          <a:lstStyle/>
-          <a:p>
-            <a:pPr algn="ctr">
-              <a:defRPr sz="1300" b="0">
-                <a:solidFill>
-                  <a:srgbClr val="E8EAED"/>
-                </a:solidFill>
-              </a:defRPr>
-            </a:pPr>
-            <a:r>
-              <a:t>UI строится из тех же fields, что и при сборе</a:t>
-            </a:r>
-          </a:p>
-        </p:txBody>
-      </p:sp>
-      <p:sp>
-        <p:nvSpPr>
-          <p:cNvPr id="21" name="Rounded Rectangle 20"/>
-          <p:cNvSpPr/>
-          <p:nvPr/>
-        </p:nvSpPr>
-        <p:spPr>
-          <a:xfrm>
-            <a:off x="6172200" y="960120"/>
-            <a:ext cx="5486400" cy="3246120"/>
-          </a:xfrm>
-          <a:prstGeom prst="roundRect">
-            <a:avLst/>
-          </a:prstGeom>
-          <a:solidFill>
-            <a:srgbClr val="0A0E18"/>
-          </a:solidFill>
-          <a:ln w="12700">
-            <a:solidFill>
-              <a:srgbClr val="3A4558"/>
-            </a:solidFill>
-          </a:ln>
-        </p:spPr>
-        <p:style>
-          <a:lnRef idx="1">
-            <a:schemeClr val="accent1"/>
-          </a:lnRef>
-          <a:fillRef idx="3">
-            <a:schemeClr val="accent1"/>
-          </a:fillRef>
-          <a:effectRef idx="2">
-            <a:schemeClr val="accent1"/>
-          </a:effectRef>
-          <a:fontRef idx="minor">
-            <a:schemeClr val="lt1"/>
-          </a:fontRef>
-        </p:style>
-        <p:txBody>
-          <a:bodyPr rtlCol="0" anchor="ctr"/>
-          <a:lstStyle/>
-          <a:p>
-            <a:pPr algn="ctr"/>
-            <a:endParaRPr/>
-          </a:p>
-        </p:txBody>
-      </p:sp>
-      <p:sp>
-        <p:nvSpPr>
-          <p:cNvPr id="22" name="Rounded Rectangle 21"/>
-          <p:cNvSpPr/>
-          <p:nvPr/>
-        </p:nvSpPr>
-        <p:spPr>
-          <a:xfrm>
-            <a:off x="7084771" y="1143000"/>
-            <a:ext cx="3661257" cy="621792"/>
-          </a:xfrm>
-          <a:prstGeom prst="roundRect">
-            <a:avLst/>
-          </a:prstGeom>
-          <a:solidFill>
-            <a:srgbClr val="1E2A3D"/>
-          </a:solidFill>
-          <a:ln w="19050">
-            <a:solidFill>
-              <a:srgbClr val="3DCC85"/>
-            </a:solidFill>
-          </a:ln>
-        </p:spPr>
-        <p:style>
-          <a:lnRef idx="1">
-            <a:schemeClr val="accent1"/>
-          </a:lnRef>
-          <a:fillRef idx="3">
-            <a:schemeClr val="accent1"/>
-          </a:fillRef>
-          <a:effectRef idx="2">
-            <a:schemeClr val="accent1"/>
-          </a:effectRef>
-          <a:fontRef idx="minor">
-            <a:schemeClr val="lt1"/>
-          </a:fontRef>
-        </p:style>
-        <p:txBody>
-          <a:bodyPr wrap="square" lIns="101600" rIns="101600" rtlCol="0" anchor="ctr"/>
-          <a:lstStyle/>
-          <a:p>
-            <a:pPr algn="ctr">
-              <a:defRPr sz="1100" b="1">
-                <a:solidFill>
-                  <a:srgbClr val="E8EAED"/>
-                </a:solidFill>
-              </a:defRPr>
-            </a:pPr>
-            <a:r>
-              <a:t>/ui/packages/</a:t>
-            </a:r>
-          </a:p>
-          <a:p>
-            <a:pPr algn="ctr">
-              <a:spcBef>
-                <a:spcPts val="300"/>
-              </a:spcBef>
-              <a:defRPr sz="800">
-                <a:solidFill>
-                  <a:srgbClr val="9CA3AF"/>
-                </a:solidFill>
-              </a:defRPr>
-            </a:pPr>
-            <a:r>
-              <a:t>список принятых пакетов</a:t>
-            </a:r>
-          </a:p>
-        </p:txBody>
-      </p:sp>
-      <p:sp>
-        <p:nvSpPr>
-          <p:cNvPr id="23" name="Rounded Rectangle 22"/>
-          <p:cNvSpPr/>
-          <p:nvPr/>
-        </p:nvSpPr>
-        <p:spPr>
-          <a:xfrm>
-            <a:off x="6391656" y="2057400"/>
-            <a:ext cx="1682496" cy="384048"/>
-          </a:xfrm>
-          <a:prstGeom prst="roundRect">
-            <a:avLst/>
-          </a:prstGeom>
-          <a:solidFill>
-            <a:srgbClr val="141A26"/>
-          </a:solidFill>
-          <a:ln w="19050">
-            <a:solidFill>
-              <a:srgbClr val="3A4558"/>
-            </a:solidFill>
-          </a:ln>
-        </p:spPr>
-        <p:style>
-          <a:lnRef idx="1">
-            <a:schemeClr val="accent1"/>
-          </a:lnRef>
-          <a:fillRef idx="3">
-            <a:schemeClr val="accent1"/>
-          </a:fillRef>
-          <a:effectRef idx="2">
-            <a:schemeClr val="accent1"/>
-          </a:effectRef>
-          <a:fontRef idx="minor">
-            <a:schemeClr val="lt1"/>
-          </a:fontRef>
-        </p:style>
-        <p:txBody>
-          <a:bodyPr wrap="square" lIns="101600" rIns="101600" rtlCol="0" anchor="ctr"/>
-          <a:lstStyle/>
-          <a:p>
-            <a:pPr algn="ctr">
-              <a:defRPr sz="900" b="1">
-                <a:solidFill>
-                  <a:srgbClr val="E8EAED"/>
-                </a:solidFill>
-              </a:defRPr>
-            </a:pPr>
-            <a:r>
-              <a:t>проект</a:t>
-            </a:r>
-          </a:p>
-        </p:txBody>
-      </p:sp>
-      <p:sp>
-        <p:nvSpPr>
-          <p:cNvPr id="24" name="Rounded Rectangle 23"/>
-          <p:cNvSpPr/>
-          <p:nvPr/>
-        </p:nvSpPr>
-        <p:spPr>
-          <a:xfrm>
-            <a:off x="8119872" y="2057400"/>
-            <a:ext cx="1682496" cy="384048"/>
-          </a:xfrm>
-          <a:prstGeom prst="roundRect">
-            <a:avLst/>
-          </a:prstGeom>
-          <a:solidFill>
-            <a:srgbClr val="141A26"/>
-          </a:solidFill>
-          <a:ln w="19050">
-            <a:solidFill>
-              <a:srgbClr val="3A4558"/>
-            </a:solidFill>
-          </a:ln>
-        </p:spPr>
-        <p:style>
-          <a:lnRef idx="1">
-            <a:schemeClr val="accent1"/>
-          </a:lnRef>
-          <a:fillRef idx="3">
-            <a:schemeClr val="accent1"/>
-          </a:fillRef>
-          <a:effectRef idx="2">
-            <a:schemeClr val="accent1"/>
-          </a:effectRef>
-          <a:fontRef idx="minor">
-            <a:schemeClr val="lt1"/>
-          </a:fontRef>
-        </p:style>
-        <p:txBody>
-          <a:bodyPr wrap="square" lIns="101600" rIns="101600" rtlCol="0" anchor="ctr"/>
-          <a:lstStyle/>
-          <a:p>
-            <a:pPr algn="ctr">
-              <a:defRPr sz="900" b="1">
-                <a:solidFill>
-                  <a:srgbClr val="E8EAED"/>
-                </a:solidFill>
-              </a:defRPr>
-            </a:pPr>
-            <a:r>
-              <a:t>статус</a:t>
-            </a:r>
-          </a:p>
-        </p:txBody>
-      </p:sp>
-      <p:sp>
-        <p:nvSpPr>
-          <p:cNvPr id="25" name="Rounded Rectangle 24"/>
-          <p:cNvSpPr/>
-          <p:nvPr/>
-        </p:nvSpPr>
-        <p:spPr>
-          <a:xfrm>
-            <a:off x="9848088" y="2057400"/>
-            <a:ext cx="1682496" cy="384048"/>
-          </a:xfrm>
-          <a:prstGeom prst="roundRect">
-            <a:avLst/>
-          </a:prstGeom>
-          <a:solidFill>
-            <a:srgbClr val="141A26"/>
-          </a:solidFill>
-          <a:ln w="19050">
-            <a:solidFill>
-              <a:srgbClr val="3A4558"/>
-            </a:solidFill>
-          </a:ln>
-        </p:spPr>
-        <p:style>
-          <a:lnRef idx="1">
-            <a:schemeClr val="accent1"/>
-          </a:lnRef>
-          <a:fillRef idx="3">
-            <a:schemeClr val="accent1"/>
-          </a:fillRef>
-          <a:effectRef idx="2">
-            <a:schemeClr val="accent1"/>
-          </a:effectRef>
-          <a:fontRef idx="minor">
-            <a:schemeClr val="lt1"/>
-          </a:fontRef>
-        </p:style>
-        <p:txBody>
-          <a:bodyPr wrap="square" lIns="101600" rIns="101600" rtlCol="0" anchor="ctr"/>
-          <a:lstStyle/>
-          <a:p>
-            <a:pPr algn="ctr">
-              <a:defRPr sz="900" b="1">
-                <a:solidFill>
-                  <a:srgbClr val="E8EAED"/>
-                </a:solidFill>
-              </a:defRPr>
-            </a:pPr>
-            <a:r>
-              <a:t>поиск</a:t>
-            </a:r>
-          </a:p>
-        </p:txBody>
-      </p:sp>
-      <p:cxnSp>
-        <p:nvCxnSpPr>
-          <p:cNvPr id="26" name="Connector 25"/>
-          <p:cNvCxnSpPr/>
-          <p:nvPr/>
-        </p:nvCxnSpPr>
-        <p:spPr>
-          <a:xfrm>
-            <a:off x="0" y="1764792"/>
-            <a:ext cx="0" cy="292608"/>
-          </a:xfrm>
-          <a:prstGeom prst="line">
-            <a:avLst/>
-          </a:prstGeom>
-          <a:ln w="25400">
-            <a:solidFill>
-              <a:srgbClr val="3DCC85"/>
-            </a:solidFill>
-          </a:ln>
-        </p:spPr>
-        <p:style>
-          <a:lnRef idx="2">
-            <a:schemeClr val="accent1"/>
-          </a:lnRef>
-          <a:fillRef idx="0">
-            <a:schemeClr val="accent1"/>
-          </a:fillRef>
-          <a:effectRef idx="1">
-            <a:schemeClr val="accent1"/>
-          </a:effectRef>
-          <a:fontRef idx="minor">
-            <a:schemeClr val="tx1"/>
-          </a:fontRef>
-        </p:style>
-      </p:cxnSp>
-      <p:sp>
-        <p:nvSpPr>
-          <p:cNvPr id="27" name="Rounded Rectangle 26"/>
-          <p:cNvSpPr/>
-          <p:nvPr/>
-        </p:nvSpPr>
-        <p:spPr>
-          <a:xfrm>
-            <a:off x="6823252" y="2587752"/>
-            <a:ext cx="4184294" cy="566928"/>
-          </a:xfrm>
-          <a:prstGeom prst="roundRect">
-            <a:avLst/>
-          </a:prstGeom>
-          <a:solidFill>
-            <a:srgbClr val="1A2E28"/>
-          </a:solidFill>
-          <a:ln w="19050">
-            <a:solidFill>
-              <a:srgbClr val="3DCC85"/>
-            </a:solidFill>
-          </a:ln>
-        </p:spPr>
-        <p:style>
-          <a:lnRef idx="1">
-            <a:schemeClr val="accent1"/>
-          </a:lnRef>
-          <a:fillRef idx="3">
-            <a:schemeClr val="accent1"/>
-          </a:fillRef>
-          <a:effectRef idx="2">
-            <a:schemeClr val="accent1"/>
-          </a:effectRef>
-          <a:fontRef idx="minor">
-            <a:schemeClr val="lt1"/>
-          </a:fontRef>
-        </p:style>
-        <p:txBody>
-          <a:bodyPr wrap="square" lIns="101600" rIns="101600" rtlCol="0" anchor="ctr"/>
-          <a:lstStyle/>
-          <a:p>
-            <a:pPr algn="ctr">
-              <a:defRPr sz="1100" b="1">
-                <a:solidFill>
-                  <a:srgbClr val="E8EAED"/>
-                </a:solidFill>
-              </a:defRPr>
-            </a:pPr>
-            <a:r>
-              <a:t>Package Workspace</a:t>
-            </a:r>
-          </a:p>
-          <a:p>
-            <a:pPr algn="ctr">
-              <a:spcBef>
-                <a:spcPts val="300"/>
-              </a:spcBef>
-              <a:defRPr sz="800">
-                <a:solidFill>
-                  <a:srgbClr val="9CA3AF"/>
-                </a:solidFill>
-              </a:defRPr>
-            </a:pPr>
-            <a:r>
-              <a:t>один пакет · все данные</a:t>
-            </a:r>
-          </a:p>
-        </p:txBody>
-      </p:sp>
-      <p:cxnSp>
-        <p:nvCxnSpPr>
-          <p:cNvPr id="28" name="Connector 27"/>
-          <p:cNvCxnSpPr/>
-          <p:nvPr/>
-        </p:nvCxnSpPr>
-        <p:spPr>
-          <a:xfrm>
-            <a:off x="0" y="2441448"/>
-            <a:ext cx="0" cy="146304"/>
-          </a:xfrm>
-          <a:prstGeom prst="line">
-            <a:avLst/>
-          </a:prstGeom>
-          <a:ln w="25400">
-            <a:solidFill>
-              <a:srgbClr val="3DCC85"/>
-            </a:solidFill>
-          </a:ln>
-        </p:spPr>
-        <p:style>
-          <a:lnRef idx="2">
-            <a:schemeClr val="accent1"/>
-          </a:lnRef>
-          <a:fillRef idx="0">
-            <a:schemeClr val="accent1"/>
-          </a:fillRef>
-          <a:effectRef idx="1">
-            <a:schemeClr val="accent1"/>
-          </a:effectRef>
-          <a:fontRef idx="minor">
-            <a:schemeClr val="tx1"/>
-          </a:fontRef>
-        </p:style>
-      </p:cxnSp>
-      <p:sp>
-        <p:nvSpPr>
-          <p:cNvPr id="29" name="Rounded Rectangle 28"/>
-          <p:cNvSpPr/>
-          <p:nvPr/>
-        </p:nvSpPr>
-        <p:spPr>
-          <a:xfrm>
-            <a:off x="6300216" y="3410712"/>
-            <a:ext cx="1245870" cy="685800"/>
-          </a:xfrm>
-          <a:prstGeom prst="roundRect">
-            <a:avLst/>
-          </a:prstGeom>
-          <a:solidFill>
-            <a:srgbClr val="1E2A3D"/>
-          </a:solidFill>
-          <a:ln w="19050">
-            <a:solidFill>
-              <a:srgbClr val="5B8DEF"/>
-            </a:solidFill>
-          </a:ln>
-        </p:spPr>
-        <p:style>
-          <a:lnRef idx="1">
-            <a:schemeClr val="accent1"/>
-          </a:lnRef>
-          <a:fillRef idx="3">
-            <a:schemeClr val="accent1"/>
-          </a:fillRef>
-          <a:effectRef idx="2">
-            <a:schemeClr val="accent1"/>
-          </a:effectRef>
-          <a:fontRef idx="minor">
-            <a:schemeClr val="lt1"/>
-          </a:fontRef>
-        </p:style>
-        <p:txBody>
-          <a:bodyPr wrap="square" lIns="101600" rIns="101600" rtlCol="0" anchor="ctr"/>
-          <a:lstStyle/>
-          <a:p>
-            <a:pPr algn="ctr">
-              <a:defRPr sz="1000" b="1">
-                <a:solidFill>
-                  <a:srgbClr val="E8EAED"/>
-                </a:solidFill>
-              </a:defRPr>
-            </a:pPr>
-            <a:r>
-              <a:t>Данные</a:t>
-            </a:r>
-          </a:p>
-        </p:txBody>
-      </p:sp>
-      <p:sp>
-        <p:nvSpPr>
-          <p:cNvPr id="30" name="Rounded Rectangle 29"/>
-          <p:cNvSpPr/>
-          <p:nvPr/>
-        </p:nvSpPr>
-        <p:spPr>
-          <a:xfrm>
-            <a:off x="7628382" y="3410712"/>
-            <a:ext cx="1245870" cy="685800"/>
-          </a:xfrm>
-          <a:prstGeom prst="roundRect">
-            <a:avLst/>
-          </a:prstGeom>
-          <a:solidFill>
-            <a:srgbClr val="1E2A3D"/>
-          </a:solidFill>
-          <a:ln w="19050">
-            <a:solidFill>
-              <a:srgbClr val="9B7ED0"/>
-            </a:solidFill>
-          </a:ln>
-        </p:spPr>
-        <p:style>
-          <a:lnRef idx="1">
-            <a:schemeClr val="accent1"/>
-          </a:lnRef>
-          <a:fillRef idx="3">
-            <a:schemeClr val="accent1"/>
-          </a:fillRef>
-          <a:effectRef idx="2">
-            <a:schemeClr val="accent1"/>
-          </a:effectRef>
-          <a:fontRef idx="minor">
-            <a:schemeClr val="lt1"/>
-          </a:fontRef>
-        </p:style>
-        <p:txBody>
-          <a:bodyPr wrap="square" lIns="101600" rIns="101600" rtlCol="0" anchor="ctr"/>
-          <a:lstStyle/>
-          <a:p>
-            <a:pPr algn="ctr">
-              <a:defRPr sz="1000" b="1">
-                <a:solidFill>
-                  <a:srgbClr val="E8EAED"/>
-                </a:solidFill>
-              </a:defRPr>
-            </a:pPr>
-            <a:r>
-              <a:t>Медиа</a:t>
-            </a:r>
-          </a:p>
-        </p:txBody>
-      </p:sp>
-      <p:sp>
-        <p:nvSpPr>
-          <p:cNvPr id="31" name="Rounded Rectangle 30"/>
-          <p:cNvSpPr/>
-          <p:nvPr/>
-        </p:nvSpPr>
-        <p:spPr>
-          <a:xfrm>
-            <a:off x="8956548" y="3410712"/>
-            <a:ext cx="1245870" cy="685800"/>
-          </a:xfrm>
-          <a:prstGeom prst="roundRect">
-            <a:avLst/>
-          </a:prstGeom>
-          <a:solidFill>
-            <a:srgbClr val="1E2A3D"/>
-          </a:solidFill>
-          <a:ln w="19050">
-            <a:solidFill>
-              <a:srgbClr val="3DCC85"/>
-            </a:solidFill>
-          </a:ln>
-        </p:spPr>
-        <p:style>
-          <a:lnRef idx="1">
-            <a:schemeClr val="accent1"/>
-          </a:lnRef>
-          <a:fillRef idx="3">
-            <a:schemeClr val="accent1"/>
-          </a:fillRef>
-          <a:effectRef idx="2">
-            <a:schemeClr val="accent1"/>
-          </a:effectRef>
-          <a:fontRef idx="minor">
-            <a:schemeClr val="lt1"/>
-          </a:fontRef>
-        </p:style>
-        <p:txBody>
-          <a:bodyPr wrap="square" lIns="101600" rIns="101600" rtlCol="0" anchor="ctr"/>
-          <a:lstStyle/>
-          <a:p>
-            <a:pPr algn="ctr">
-              <a:defRPr sz="1000" b="1">
-                <a:solidFill>
-                  <a:srgbClr val="E8EAED"/>
-                </a:solidFill>
-              </a:defRPr>
-            </a:pPr>
-            <a:r>
-              <a:t>Viz</a:t>
-            </a:r>
-          </a:p>
-        </p:txBody>
-      </p:sp>
-      <p:sp>
-        <p:nvSpPr>
-          <p:cNvPr id="32" name="Rounded Rectangle 31"/>
-          <p:cNvSpPr/>
-          <p:nvPr/>
-        </p:nvSpPr>
-        <p:spPr>
-          <a:xfrm>
-            <a:off x="10284714" y="3410712"/>
-            <a:ext cx="1245870" cy="685800"/>
-          </a:xfrm>
-          <a:prstGeom prst="roundRect">
-            <a:avLst/>
-          </a:prstGeom>
-          <a:solidFill>
-            <a:srgbClr val="1E2A3D"/>
-          </a:solidFill>
-          <a:ln w="19050">
-            <a:solidFill>
-              <a:srgbClr val="D4A84B"/>
-            </a:solidFill>
-          </a:ln>
-        </p:spPr>
-        <p:style>
-          <a:lnRef idx="1">
-            <a:schemeClr val="accent1"/>
-          </a:lnRef>
-          <a:fillRef idx="3">
-            <a:schemeClr val="accent1"/>
-          </a:fillRef>
-          <a:effectRef idx="2">
-            <a:schemeClr val="accent1"/>
-          </a:effectRef>
-          <a:fontRef idx="minor">
-            <a:schemeClr val="lt1"/>
-          </a:fontRef>
-        </p:style>
-        <p:txBody>
-          <a:bodyPr wrap="square" lIns="101600" rIns="101600" rtlCol="0" anchor="ctr"/>
-          <a:lstStyle/>
-          <a:p>
-            <a:pPr algn="ctr">
-              <a:defRPr sz="1000" b="1">
-                <a:solidFill>
-                  <a:srgbClr val="E8EAED"/>
-                </a:solidFill>
-              </a:defRPr>
-            </a:pPr>
-            <a:r>
-              <a:t>История</a:t>
-            </a:r>
-          </a:p>
-        </p:txBody>
-      </p:sp>
-      <p:cxnSp>
-        <p:nvCxnSpPr>
-          <p:cNvPr id="33" name="Connector 32"/>
-          <p:cNvCxnSpPr/>
-          <p:nvPr/>
-        </p:nvCxnSpPr>
-        <p:spPr>
-          <a:xfrm>
-            <a:off x="0" y="3154680"/>
-            <a:ext cx="0" cy="256032"/>
-          </a:xfrm>
-          <a:prstGeom prst="line">
-            <a:avLst/>
-          </a:prstGeom>
-          <a:ln w="25400">
-            <a:solidFill>
-              <a:srgbClr val="3DCC85"/>
-            </a:solidFill>
-          </a:ln>
-        </p:spPr>
-        <p:style>
-          <a:lnRef idx="2">
-            <a:schemeClr val="accent1"/>
-          </a:lnRef>
-          <a:fillRef idx="0">
-            <a:schemeClr val="accent1"/>
-          </a:fillRef>
-          <a:effectRef idx="1">
-            <a:schemeClr val="accent1"/>
-          </a:effectRef>
-          <a:fontRef idx="minor">
-            <a:schemeClr val="tx1"/>
-          </a:fontRef>
-        </p:style>
-      </p:cxnSp>
-      <p:sp>
-        <p:nvSpPr>
-          <p:cNvPr id="34" name="Rounded Rectangle 33"/>
-          <p:cNvSpPr/>
-          <p:nvPr/>
-        </p:nvSpPr>
-        <p:spPr>
-          <a:xfrm>
-            <a:off x="6172200" y="4343400"/>
-            <a:ext cx="2651760" cy="1965960"/>
-          </a:xfrm>
-          <a:prstGeom prst="roundRect">
-            <a:avLst/>
-          </a:prstGeom>
-          <a:solidFill>
-            <a:srgbClr val="1A202C"/>
-          </a:solidFill>
-          <a:ln w="12700">
-            <a:solidFill>
-              <a:srgbClr val="3DCC85"/>
-            </a:solidFill>
-          </a:ln>
-        </p:spPr>
-        <p:style>
-          <a:lnRef idx="1">
-            <a:schemeClr val="accent1"/>
-          </a:lnRef>
-          <a:fillRef idx="3">
-            <a:schemeClr val="accent1"/>
-          </a:fillRef>
-          <a:effectRef idx="2">
-            <a:schemeClr val="accent1"/>
-          </a:effectRef>
-          <a:fontRef idx="minor">
-            <a:schemeClr val="lt1"/>
-          </a:fontRef>
-        </p:style>
-        <p:txBody>
-          <a:bodyPr rtlCol="0" anchor="ctr"/>
-          <a:lstStyle/>
-          <a:p>
-            <a:pPr algn="ctr"/>
-            <a:endParaRPr/>
-          </a:p>
-        </p:txBody>
-      </p:sp>
-      <p:sp>
-        <p:nvSpPr>
-          <p:cNvPr id="35" name="Rounded Rectangle 34"/>
-          <p:cNvSpPr/>
-          <p:nvPr/>
-        </p:nvSpPr>
-        <p:spPr>
-          <a:xfrm>
-            <a:off x="6263640" y="4434840"/>
-            <a:ext cx="2468880" cy="1783080"/>
-          </a:xfrm>
-          <a:prstGeom prst="roundRect">
-            <a:avLst/>
-          </a:prstGeom>
-          <a:solidFill>
-            <a:srgbClr val="182030"/>
-          </a:solidFill>
-          <a:ln w="12700">
-            <a:solidFill>
-              <a:srgbClr val="3A4558"/>
-            </a:solidFill>
-          </a:ln>
-        </p:spPr>
-        <p:style>
-          <a:lnRef idx="1">
-            <a:schemeClr val="accent1"/>
-          </a:lnRef>
-          <a:fillRef idx="3">
-            <a:schemeClr val="accent1"/>
-          </a:fillRef>
-          <a:effectRef idx="2">
-            <a:schemeClr val="accent1"/>
-          </a:effectRef>
-          <a:fontRef idx="minor">
-            <a:schemeClr val="lt1"/>
-          </a:fontRef>
-        </p:style>
-        <p:txBody>
-          <a:bodyPr rtlCol="0" anchor="ctr"/>
-          <a:lstStyle/>
-          <a:p>
-            <a:pPr algn="ctr">
-              <a:defRPr sz="1000">
-                <a:solidFill>
-                  <a:srgbClr val="9CA3AF"/>
-                </a:solidFill>
-              </a:defRPr>
-            </a:pPr>
-            <a:r>
-              <a:t>список пакетов</a:t>
-            </a:r>
-          </a:p>
-        </p:txBody>
-      </p:sp>
-      <p:sp>
-        <p:nvSpPr>
-          <p:cNvPr id="36" name="Rounded Rectangle 35"/>
-          <p:cNvSpPr/>
-          <p:nvPr/>
-        </p:nvSpPr>
-        <p:spPr>
-          <a:xfrm>
-            <a:off x="7818120" y="4416552"/>
-            <a:ext cx="914400" cy="219456"/>
-          </a:xfrm>
-          <a:prstGeom prst="roundRect">
-            <a:avLst/>
-          </a:prstGeom>
-          <a:solidFill>
-            <a:srgbClr val="3DCC85"/>
-          </a:solidFill>
-          <a:ln>
-            <a:noFill/>
-          </a:ln>
-        </p:spPr>
-        <p:style>
-          <a:lnRef idx="1">
-            <a:schemeClr val="accent1"/>
-          </a:lnRef>
-          <a:fillRef idx="3">
-            <a:schemeClr val="accent1"/>
-          </a:fillRef>
-          <a:effectRef idx="2">
-            <a:schemeClr val="accent1"/>
-          </a:effectRef>
-          <a:fontRef idx="minor">
-            <a:schemeClr val="lt1"/>
-          </a:fontRef>
-        </p:style>
-        <p:txBody>
-          <a:bodyPr rtlCol="0" anchor="ctr"/>
-          <a:lstStyle/>
-          <a:p>
-            <a:pPr algn="ctr">
-              <a:defRPr sz="600" b="1">
-                <a:solidFill>
-                  <a:srgbClr val="E8EAED"/>
-                </a:solidFill>
-              </a:defRPr>
-            </a:pPr>
-            <a:r>
-              <a:t>SCREENSHOT</a:t>
-            </a:r>
-          </a:p>
-        </p:txBody>
-      </p:sp>
-      <p:sp>
-        <p:nvSpPr>
-          <p:cNvPr id="37" name="Rounded Rectangle 36"/>
-          <p:cNvSpPr/>
-          <p:nvPr/>
-        </p:nvSpPr>
-        <p:spPr>
-          <a:xfrm>
-            <a:off x="9006840" y="4343400"/>
-            <a:ext cx="2651760" cy="1965960"/>
-          </a:xfrm>
-          <a:prstGeom prst="roundRect">
-            <a:avLst/>
-          </a:prstGeom>
-          <a:solidFill>
-            <a:srgbClr val="1A202C"/>
-          </a:solidFill>
-          <a:ln w="12700">
-            <a:solidFill>
-              <a:srgbClr val="3DCC85"/>
-            </a:solidFill>
-          </a:ln>
-        </p:spPr>
-        <p:style>
-          <a:lnRef idx="1">
-            <a:schemeClr val="accent1"/>
-          </a:lnRef>
-          <a:fillRef idx="3">
-            <a:schemeClr val="accent1"/>
-          </a:fillRef>
-          <a:effectRef idx="2">
-            <a:schemeClr val="accent1"/>
-          </a:effectRef>
-          <a:fontRef idx="minor">
-            <a:schemeClr val="lt1"/>
-          </a:fontRef>
-        </p:style>
-        <p:txBody>
-          <a:bodyPr rtlCol="0" anchor="ctr"/>
-          <a:lstStyle/>
-          <a:p>
-            <a:pPr algn="ctr"/>
-            <a:endParaRPr/>
-          </a:p>
-        </p:txBody>
-      </p:sp>
-      <p:sp>
-        <p:nvSpPr>
-          <p:cNvPr id="38" name="Rounded Rectangle 37"/>
-          <p:cNvSpPr/>
-          <p:nvPr/>
-        </p:nvSpPr>
-        <p:spPr>
-          <a:xfrm>
-            <a:off x="9098280" y="4434840"/>
-            <a:ext cx="2468880" cy="1783080"/>
-          </a:xfrm>
-          <a:prstGeom prst="roundRect">
-            <a:avLst/>
-          </a:prstGeom>
-          <a:solidFill>
-            <a:srgbClr val="182030"/>
-          </a:solidFill>
-          <a:ln w="12700">
-            <a:solidFill>
-              <a:srgbClr val="3A4558"/>
-            </a:solidFill>
-          </a:ln>
-        </p:spPr>
-        <p:style>
-          <a:lnRef idx="1">
-            <a:schemeClr val="accent1"/>
-          </a:lnRef>
-          <a:fillRef idx="3">
-            <a:schemeClr val="accent1"/>
-          </a:fillRef>
-          <a:effectRef idx="2">
-            <a:schemeClr val="accent1"/>
-          </a:effectRef>
-          <a:fontRef idx="minor">
-            <a:schemeClr val="lt1"/>
-          </a:fontRef>
-        </p:style>
-        <p:txBody>
-          <a:bodyPr rtlCol="0" anchor="ctr"/>
-          <a:lstStyle/>
-          <a:p>
-            <a:pPr algn="ctr">
-              <a:defRPr sz="1000">
-                <a:solidFill>
-                  <a:srgbClr val="9CA3AF"/>
-                </a:solidFill>
-              </a:defRPr>
-            </a:pPr>
-            <a:r>
-              <a:t>workspace · вкладки</a:t>
-            </a:r>
-          </a:p>
-        </p:txBody>
-      </p:sp>
-      <p:sp>
-        <p:nvSpPr>
-          <p:cNvPr id="39" name="Rounded Rectangle 38"/>
-          <p:cNvSpPr/>
-          <p:nvPr/>
-        </p:nvSpPr>
-        <p:spPr>
-          <a:xfrm>
-            <a:off x="10652760" y="4416552"/>
-            <a:ext cx="914400" cy="219456"/>
-          </a:xfrm>
-          <a:prstGeom prst="roundRect">
-            <a:avLst/>
-          </a:prstGeom>
-          <a:solidFill>
-            <a:srgbClr val="3DCC85"/>
-          </a:solidFill>
-          <a:ln>
-            <a:noFill/>
-          </a:ln>
-        </p:spPr>
-        <p:style>
-          <a:lnRef idx="1">
-            <a:schemeClr val="accent1"/>
-          </a:lnRef>
-          <a:fillRef idx="3">
-            <a:schemeClr val="accent1"/>
-          </a:fillRef>
-          <a:effectRef idx="2">
-            <a:schemeClr val="accent1"/>
-          </a:effectRef>
-          <a:fontRef idx="minor">
-            <a:schemeClr val="lt1"/>
-          </a:fontRef>
-        </p:style>
-        <p:txBody>
-          <a:bodyPr rtlCol="0" anchor="ctr"/>
-          <a:lstStyle/>
-          <a:p>
-            <a:pPr algn="ctr">
-              <a:defRPr sz="600" b="1">
-                <a:solidFill>
-                  <a:srgbClr val="E8EAED"/>
-                </a:solidFill>
-              </a:defRPr>
-            </a:pPr>
-            <a:r>
-              <a:t>SCREENSHOT</a:t>
-            </a:r>
-          </a:p>
-        </p:txBody>
-      </p:sp>
-    </p:spTree>
-  </p:cSld>
-  <p:clrMapOvr>
-    <a:masterClrMapping/>
-  </p:clrMapOvr>
-</p:sld>
-</file>
-
-<file path=ppt/slides/slide11.xml><?xml version="1.0" encoding="utf-8"?>
-<p:sld xmlns:a="http://schemas.openxmlformats.org/drawingml/2006/main" xmlns:r="http://schemas.openxmlformats.org/officeDocument/2006/relationships" xmlns:p="http://schemas.openxmlformats.org/presentationml/2006/main">
-  <p:cSld>
-    <p:bg>
-      <p:bgPr>
-        <a:gradFill rotWithShape="1">
-          <a:gsLst>
-            <a:gs pos="0">
-              <a:srgbClr val="0E1828"/>
-            </a:gs>
-            <a:gs pos="100000">
-              <a:srgbClr val="0A0E18"/>
-            </a:gs>
-          </a:gsLst>
-          <a:lin ang="12000000" scaled="0"/>
-        </a:gradFill>
-        <a:effectLst/>
-      </p:bgPr>
-    </p:bg>
-    <p:spTree>
-      <p:nvGrpSpPr>
-        <p:cNvPr id="1" name=""/>
-        <p:cNvGrpSpPr/>
-        <p:nvPr/>
-      </p:nvGrpSpPr>
-      <p:grpSpPr>
-        <a:xfrm>
-          <a:off x="0" y="0"/>
-          <a:ext cx="0" cy="0"/>
-          <a:chOff x="0" y="0"/>
-          <a:chExt cx="0" cy="0"/>
-        </a:xfrm>
-      </p:grpSpPr>
-      <p:sp>
-        <p:nvSpPr>
-          <p:cNvPr id="2" name="Oval 1"/>
-          <p:cNvSpPr/>
-          <p:nvPr/>
-        </p:nvSpPr>
-        <p:spPr>
-          <a:xfrm>
-            <a:off x="-1097280" y="-914400"/>
-            <a:ext cx="3200400" cy="3200400"/>
-          </a:xfrm>
-          <a:prstGeom prst="ellipse">
-            <a:avLst/>
-          </a:prstGeom>
-          <a:solidFill>
-            <a:srgbClr val="3A5A9E"/>
-          </a:solidFill>
-          <a:ln>
-            <a:noFill/>
-          </a:ln>
-        </p:spPr>
-        <p:style>
-          <a:lnRef idx="1">
-            <a:schemeClr val="accent1"/>
-          </a:lnRef>
-          <a:fillRef idx="3">
-            <a:schemeClr val="accent1"/>
-          </a:fillRef>
-          <a:effectRef idx="2">
-            <a:schemeClr val="accent1"/>
-          </a:effectRef>
-          <a:fontRef idx="minor">
-            <a:schemeClr val="lt1"/>
-          </a:fontRef>
-        </p:style>
-        <p:txBody>
-          <a:bodyPr rtlCol="0" anchor="ctr"/>
-          <a:lstStyle/>
-          <a:p>
-            <a:pPr algn="ctr"/>
-            <a:endParaRPr/>
-          </a:p>
-        </p:txBody>
-      </p:sp>
-      <p:sp>
-        <p:nvSpPr>
-          <p:cNvPr id="3" name="Oval 2"/>
-          <p:cNvSpPr/>
-          <p:nvPr/>
-        </p:nvSpPr>
-        <p:spPr>
-          <a:xfrm>
-            <a:off x="10515600" y="5303520"/>
-            <a:ext cx="2560320" cy="2560320"/>
-          </a:xfrm>
-          <a:prstGeom prst="ellipse">
-            <a:avLst/>
-          </a:prstGeom>
-          <a:solidFill>
-            <a:srgbClr val="2A3550"/>
-          </a:solidFill>
-          <a:ln>
-            <a:noFill/>
-          </a:ln>
-        </p:spPr>
-        <p:style>
-          <a:lnRef idx="1">
-            <a:schemeClr val="accent1"/>
-          </a:lnRef>
-          <a:fillRef idx="3">
-            <a:schemeClr val="accent1"/>
-          </a:fillRef>
-          <a:effectRef idx="2">
-            <a:schemeClr val="accent1"/>
-          </a:effectRef>
-          <a:fontRef idx="minor">
-            <a:schemeClr val="lt1"/>
-          </a:fontRef>
-        </p:style>
-        <p:txBody>
-          <a:bodyPr rtlCol="0" anchor="ctr"/>
-          <a:lstStyle/>
-          <a:p>
-            <a:pPr algn="ctr"/>
-            <a:endParaRPr/>
-          </a:p>
-        </p:txBody>
-      </p:sp>
-      <p:sp>
-        <p:nvSpPr>
-          <p:cNvPr id="4" name="Rectangle 3"/>
-          <p:cNvSpPr/>
-          <p:nvPr/>
-        </p:nvSpPr>
-        <p:spPr>
-          <a:xfrm>
-            <a:off x="0" y="0"/>
-            <a:ext cx="12191695" cy="73152"/>
-          </a:xfrm>
-          <a:prstGeom prst="rect">
-            <a:avLst/>
-          </a:prstGeom>
-          <a:solidFill>
-            <a:srgbClr val="3DCC85"/>
-          </a:solidFill>
-          <a:ln>
-            <a:noFill/>
-          </a:ln>
-        </p:spPr>
-        <p:style>
-          <a:lnRef idx="1">
-            <a:schemeClr val="accent1"/>
-          </a:lnRef>
-          <a:fillRef idx="3">
-            <a:schemeClr val="accent1"/>
-          </a:fillRef>
-          <a:effectRef idx="2">
-            <a:schemeClr val="accent1"/>
-          </a:effectRef>
-          <a:fontRef idx="minor">
-            <a:schemeClr val="lt1"/>
-          </a:fontRef>
-        </p:style>
-        <p:txBody>
-          <a:bodyPr rtlCol="0" anchor="ctr"/>
-          <a:lstStyle/>
-          <a:p>
-            <a:pPr algn="ctr"/>
-            <a:endParaRPr/>
-          </a:p>
-        </p:txBody>
-      </p:sp>
-      <p:sp>
-        <p:nvSpPr>
-          <p:cNvPr id="5" name="Rounded Rectangle 4"/>
-          <p:cNvSpPr/>
-          <p:nvPr/>
-        </p:nvSpPr>
-        <p:spPr>
-          <a:xfrm>
-            <a:off x="1097280" y="1371600"/>
-            <a:ext cx="9966960" cy="4114800"/>
-          </a:xfrm>
-          <a:prstGeom prst="roundRect">
-            <a:avLst/>
-          </a:prstGeom>
-          <a:solidFill>
-            <a:srgbClr val="1E2A3D"/>
-          </a:solidFill>
-          <a:ln w="12700">
-            <a:solidFill>
-              <a:srgbClr val="3DCC85"/>
-            </a:solidFill>
-          </a:ln>
-        </p:spPr>
-        <p:style>
-          <a:lnRef idx="1">
-            <a:schemeClr val="accent1"/>
-          </a:lnRef>
-          <a:fillRef idx="3">
-            <a:schemeClr val="accent1"/>
-          </a:fillRef>
-          <a:effectRef idx="2">
-            <a:schemeClr val="accent1"/>
-          </a:effectRef>
-          <a:fontRef idx="minor">
-            <a:schemeClr val="lt1"/>
-          </a:fontRef>
-        </p:style>
-        <p:txBody>
-          <a:bodyPr rtlCol="0" anchor="ctr"/>
-          <a:lstStyle/>
-          <a:p>
-            <a:pPr algn="ctr"/>
-            <a:endParaRPr/>
-          </a:p>
-        </p:txBody>
-      </p:sp>
-      <p:sp>
-        <p:nvSpPr>
-          <p:cNvPr id="6" name="TextBox 5"/>
-          <p:cNvSpPr txBox="1"/>
-          <p:nvPr/>
-        </p:nvSpPr>
-        <p:spPr>
-          <a:xfrm>
-            <a:off x="1508760" y="1691640"/>
-            <a:ext cx="9144000" cy="548640"/>
-          </a:xfrm>
-          <a:prstGeom prst="rect">
-            <a:avLst/>
-          </a:prstGeom>
-          <a:noFill/>
-        </p:spPr>
-        <p:txBody>
-          <a:bodyPr wrap="square" anchor="t">
-            <a:spAutoFit/>
-          </a:bodyPr>
-          <a:lstStyle/>
-          <a:p>
-            <a:pPr algn="ctr">
-              <a:defRPr sz="2800" b="1">
-                <a:solidFill>
-                  <a:srgbClr val="E8EAED"/>
-                </a:solidFill>
-              </a:defRPr>
-            </a:pPr>
-            <a:r>
-              <a:t>Data Collector в одном предложении</a:t>
-            </a:r>
-          </a:p>
-        </p:txBody>
-      </p:sp>
-      <p:sp>
-        <p:nvSpPr>
-          <p:cNvPr id="7" name="TextBox 6"/>
-          <p:cNvSpPr txBox="1"/>
-          <p:nvPr/>
-        </p:nvSpPr>
-        <p:spPr>
-          <a:xfrm>
-            <a:off x="1508760" y="2423160"/>
-            <a:ext cx="9144000" cy="2011680"/>
-          </a:xfrm>
-          <a:prstGeom prst="rect">
-            <a:avLst/>
-          </a:prstGeom>
-          <a:noFill/>
-        </p:spPr>
-        <p:txBody>
-          <a:bodyPr wrap="square" anchor="t">
-            <a:spAutoFit/>
-          </a:bodyPr>
-          <a:lstStyle/>
-          <a:p>
-            <a:pPr algn="ctr">
-              <a:defRPr sz="1800" b="0">
-                <a:solidFill>
-                  <a:srgbClr val="9CA3AF"/>
-                </a:solidFill>
-              </a:defRPr>
-            </a:pPr>
-            <a:r>
-              <a:t>Админ описывает сценарий в JSON → приложение проводит сборщика по шагам → пакет с медиа попадает в админку → команда видит данные без ручной склейки.</a:t>
-            </a:r>
-          </a:p>
-        </p:txBody>
-      </p:sp>
-      <p:sp>
-        <p:nvSpPr>
-          <p:cNvPr id="8" name="Rounded Rectangle 7"/>
-          <p:cNvSpPr/>
-          <p:nvPr/>
-        </p:nvSpPr>
-        <p:spPr>
-          <a:xfrm>
-            <a:off x="3200400" y="4572000"/>
-            <a:ext cx="5760720" cy="502920"/>
-          </a:xfrm>
-          <a:prstGeom prst="roundRect">
-            <a:avLst/>
-          </a:prstGeom>
-          <a:solidFill>
-            <a:srgbClr val="5B8DEF"/>
-          </a:solidFill>
-          <a:ln>
-            <a:noFill/>
-          </a:ln>
-        </p:spPr>
-        <p:style>
-          <a:lnRef idx="1">
-            <a:schemeClr val="accent1"/>
-          </a:lnRef>
-          <a:fillRef idx="3">
-            <a:schemeClr val="accent1"/>
-          </a:fillRef>
-          <a:effectRef idx="2">
-            <a:schemeClr val="accent1"/>
-          </a:effectRef>
-          <a:fontRef idx="minor">
-            <a:schemeClr val="lt1"/>
-          </a:fontRef>
-        </p:style>
-        <p:txBody>
-          <a:bodyPr rtlCol="0" anchor="ctr"/>
-          <a:lstStyle/>
-          <a:p>
-            <a:pPr algn="ctr">
-              <a:defRPr sz="1300" b="1">
-                <a:solidFill>
-                  <a:srgbClr val="E8EAED"/>
-                </a:solidFill>
-              </a:defRPr>
-            </a:pPr>
-            <a:r>
-              <a:t>Опишите поля и flow — соберём demo под ваш кейс</a:t>
-            </a:r>
-          </a:p>
-        </p:txBody>
-      </p:sp>
-      <p:sp>
-        <p:nvSpPr>
-          <p:cNvPr id="9" name="TextBox 8"/>
-          <p:cNvSpPr txBox="1"/>
-          <p:nvPr/>
-        </p:nvSpPr>
-        <p:spPr>
-          <a:xfrm>
-            <a:off x="10972800" y="6583680"/>
-            <a:ext cx="822960" cy="256032"/>
-          </a:xfrm>
-          <a:prstGeom prst="rect">
-            <a:avLst/>
-          </a:prstGeom>
-          <a:noFill/>
-        </p:spPr>
-        <p:txBody>
-          <a:bodyPr wrap="square" anchor="t">
-            <a:spAutoFit/>
-          </a:bodyPr>
-          <a:lstStyle/>
-          <a:p>
-            <a:pPr algn="r">
-              <a:defRPr sz="900" b="0">
-                <a:solidFill>
-                  <a:srgbClr val="6B7280"/>
-                </a:solidFill>
-              </a:defRPr>
-            </a:pPr>
-            <a:r>
-              <a:t>11 / 11</a:t>
-            </a:r>
-          </a:p>
-        </p:txBody>
-      </p:sp>
     </p:spTree>
   </p:cSld>
   <p:clrMapOvr>
@@ -6817,7 +4091,7 @@
         </p:nvSpPr>
         <p:spPr>
           <a:xfrm>
-            <a:off x="594360" y="1837944"/>
+            <a:off x="3087394" y="1965960"/>
             <a:ext cx="45720" cy="420624"/>
           </a:xfrm>
           <a:prstGeom prst="rect">
@@ -6861,7 +4135,7 @@
         </p:nvSpPr>
         <p:spPr>
           <a:xfrm>
-            <a:off x="667512" y="1783080"/>
+            <a:off x="3160546" y="1911096"/>
             <a:ext cx="5596128" cy="530352"/>
           </a:xfrm>
           <a:prstGeom prst="roundRect">
@@ -6915,7 +4189,7 @@
         </p:nvSpPr>
         <p:spPr>
           <a:xfrm>
-            <a:off x="594360" y="2441448"/>
+            <a:off x="3087394" y="2569464"/>
             <a:ext cx="45720" cy="420624"/>
           </a:xfrm>
           <a:prstGeom prst="rect">
@@ -6959,7 +4233,7 @@
         </p:nvSpPr>
         <p:spPr>
           <a:xfrm>
-            <a:off x="667512" y="2386584"/>
+            <a:off x="3160546" y="2514600"/>
             <a:ext cx="5596128" cy="530352"/>
           </a:xfrm>
           <a:prstGeom prst="roundRect">
@@ -7013,7 +4287,7 @@
         </p:nvSpPr>
         <p:spPr>
           <a:xfrm>
-            <a:off x="594360" y="3044952"/>
+            <a:off x="3087394" y="3172968"/>
             <a:ext cx="45720" cy="420624"/>
           </a:xfrm>
           <a:prstGeom prst="rect">
@@ -7057,7 +4331,7 @@
         </p:nvSpPr>
         <p:spPr>
           <a:xfrm>
-            <a:off x="667512" y="2990088"/>
+            <a:off x="3160546" y="3118104"/>
             <a:ext cx="5596128" cy="530352"/>
           </a:xfrm>
           <a:prstGeom prst="roundRect">
@@ -7111,7 +4385,7 @@
         </p:nvSpPr>
         <p:spPr>
           <a:xfrm>
-            <a:off x="594360" y="3739896"/>
+            <a:off x="3087394" y="3867912"/>
             <a:ext cx="45720" cy="585216"/>
           </a:xfrm>
           <a:prstGeom prst="rect">
@@ -7155,7 +4429,7 @@
         </p:nvSpPr>
         <p:spPr>
           <a:xfrm>
-            <a:off x="667512" y="3685032"/>
+            <a:off x="3160546" y="3813048"/>
             <a:ext cx="5596128" cy="694944"/>
           </a:xfrm>
           <a:prstGeom prst="roundRect">
@@ -7196,160 +4470,98 @@
               </a:defRPr>
             </a:pPr>
             <a:r>
-              <a:t>Решение: конфиг → UI в приложении → пакет на сервер → просмотр в админке</a:t>
-            </a:r>
-          </a:p>
-        </p:txBody>
-      </p:sp>
-      <p:sp>
-        <p:nvSpPr>
-          <p:cNvPr id="20" name="Rounded Rectangle 19"/>
-          <p:cNvSpPr/>
-          <p:nvPr/>
-        </p:nvSpPr>
-        <p:spPr>
-          <a:xfrm>
-            <a:off x="6537960" y="960120"/>
-            <a:ext cx="5074920" cy="5349240"/>
-          </a:xfrm>
-          <a:prstGeom prst="roundRect">
-            <a:avLst/>
-          </a:prstGeom>
-          <a:solidFill>
-            <a:srgbClr val="1A202C"/>
-          </a:solidFill>
-          <a:ln w="12700">
-            <a:solidFill>
-              <a:srgbClr val="5B8DEF"/>
-            </a:solidFill>
-          </a:ln>
-        </p:spPr>
-        <p:style>
-          <a:lnRef idx="1">
-            <a:schemeClr val="accent1"/>
-          </a:lnRef>
-          <a:fillRef idx="3">
-            <a:schemeClr val="accent1"/>
-          </a:fillRef>
-          <a:effectRef idx="2">
-            <a:schemeClr val="accent1"/>
-          </a:effectRef>
-          <a:fontRef idx="minor">
-            <a:schemeClr val="lt1"/>
-          </a:fontRef>
-        </p:style>
-        <p:txBody>
-          <a:bodyPr rtlCol="0" anchor="ctr"/>
-          <a:lstStyle/>
-          <a:p>
-            <a:pPr algn="ctr"/>
-            <a:endParaRPr/>
-          </a:p>
-        </p:txBody>
-      </p:sp>
-      <p:sp>
-        <p:nvSpPr>
-          <p:cNvPr id="21" name="Rounded Rectangle 20"/>
-          <p:cNvSpPr/>
-          <p:nvPr/>
-        </p:nvSpPr>
-        <p:spPr>
-          <a:xfrm>
-            <a:off x="6629400" y="1051560"/>
-            <a:ext cx="4892040" cy="5166360"/>
-          </a:xfrm>
-          <a:prstGeom prst="roundRect">
-            <a:avLst/>
-          </a:prstGeom>
-          <a:solidFill>
-            <a:srgbClr val="182030"/>
-          </a:solidFill>
-          <a:ln w="12700">
-            <a:solidFill>
-              <a:srgbClr val="3A4558"/>
-            </a:solidFill>
-          </a:ln>
-        </p:spPr>
-        <p:style>
-          <a:lnRef idx="1">
-            <a:schemeClr val="accent1"/>
-          </a:lnRef>
-          <a:fillRef idx="3">
-            <a:schemeClr val="accent1"/>
-          </a:fillRef>
-          <a:effectRef idx="2">
-            <a:schemeClr val="accent1"/>
-          </a:effectRef>
-          <a:fontRef idx="minor">
-            <a:schemeClr val="lt1"/>
-          </a:fontRef>
-        </p:style>
-        <p:txBody>
-          <a:bodyPr rtlCol="0" anchor="ctr"/>
-          <a:lstStyle/>
-          <a:p>
-            <a:pPr algn="ctr">
-              <a:defRPr sz="1000">
-                <a:solidFill>
-                  <a:srgbClr val="9CA3AF"/>
-                </a:solidFill>
-              </a:defRPr>
-            </a:pPr>
-            <a:r>
-              <a:t>до / после — хаос vs список пакетов</a:t>
-            </a:r>
-          </a:p>
-        </p:txBody>
-      </p:sp>
-      <p:sp>
-        <p:nvSpPr>
-          <p:cNvPr id="22" name="Rounded Rectangle 21"/>
-          <p:cNvSpPr/>
-          <p:nvPr/>
-        </p:nvSpPr>
-        <p:spPr>
-          <a:xfrm>
-            <a:off x="10607040" y="1033272"/>
-            <a:ext cx="914400" cy="219456"/>
-          </a:xfrm>
-          <a:prstGeom prst="roundRect">
-            <a:avLst/>
-          </a:prstGeom>
-          <a:solidFill>
-            <a:srgbClr val="5B8DEF"/>
-          </a:solidFill>
-          <a:ln>
-            <a:noFill/>
-          </a:ln>
-        </p:spPr>
-        <p:style>
-          <a:lnRef idx="1">
-            <a:schemeClr val="accent1"/>
-          </a:lnRef>
-          <a:fillRef idx="3">
-            <a:schemeClr val="accent1"/>
-          </a:fillRef>
-          <a:effectRef idx="2">
-            <a:schemeClr val="accent1"/>
-          </a:effectRef>
-          <a:fontRef idx="minor">
-            <a:schemeClr val="lt1"/>
-          </a:fontRef>
-        </p:style>
-        <p:txBody>
-          <a:bodyPr rtlCol="0" anchor="ctr"/>
-          <a:lstStyle/>
-          <a:p>
-            <a:pPr algn="ctr">
-              <a:defRPr sz="600" b="1">
-                <a:solidFill>
-                  <a:srgbClr val="E8EAED"/>
-                </a:solidFill>
-              </a:defRPr>
-            </a:pPr>
-            <a:r>
-              <a:t>SCREENSHOT</a:t>
-            </a:r>
+              <a:rPr dirty="0" err="1"/>
+              <a:t>Решение</a:t>
+            </a:r>
+            <a:r>
+              <a:rPr dirty="0"/>
+              <a:t>: </a:t>
+            </a:r>
+            <a:r>
+              <a:rPr dirty="0" err="1"/>
+              <a:t>конфиг</a:t>
+            </a:r>
+            <a:r>
+              <a:rPr lang="ru-RU" dirty="0"/>
+              <a:t> сбора данных</a:t>
+            </a:r>
+            <a:r>
+              <a:rPr dirty="0"/>
+              <a:t> → UI </a:t>
+            </a:r>
+            <a:r>
+              <a:rPr lang="ru-RU" dirty="0"/>
+              <a:t> рендер конфига </a:t>
+            </a:r>
+            <a:r>
+              <a:rPr dirty="0"/>
+              <a:t>в </a:t>
+            </a:r>
+            <a:r>
+              <a:rPr lang="ru-RU" dirty="0"/>
+              <a:t>мобильном </a:t>
+            </a:r>
+            <a:r>
+              <a:rPr dirty="0" err="1"/>
+              <a:t>приложении</a:t>
+            </a:r>
+            <a:r>
+              <a:rPr dirty="0"/>
+              <a:t> → </a:t>
+            </a:r>
+            <a:r>
+              <a:rPr lang="ru-RU" dirty="0"/>
+              <a:t>отправка </a:t>
+            </a:r>
+            <a:r>
+              <a:rPr dirty="0" err="1"/>
+              <a:t>пакет</a:t>
+            </a:r>
+            <a:r>
+              <a:rPr lang="ru-RU" dirty="0"/>
+              <a:t>а</a:t>
+            </a:r>
+            <a:r>
+              <a:rPr dirty="0"/>
+              <a:t> </a:t>
+            </a:r>
+            <a:r>
+              <a:rPr dirty="0" err="1"/>
+              <a:t>на</a:t>
+            </a:r>
+            <a:r>
+              <a:rPr dirty="0"/>
+              <a:t> </a:t>
+            </a:r>
+            <a:r>
+              <a:rPr dirty="0" err="1"/>
+              <a:t>сервер</a:t>
+            </a:r>
+            <a:r>
+              <a:rPr dirty="0"/>
+              <a:t> → </a:t>
+            </a:r>
+            <a:r>
+              <a:rPr dirty="0" err="1"/>
+              <a:t>просмотр</a:t>
+            </a:r>
+            <a:r>
+              <a:rPr lang="ru-RU" dirty="0"/>
+              <a:t> пакетов</a:t>
+            </a:r>
+            <a:r>
+              <a:rPr dirty="0"/>
+              <a:t> в </a:t>
+            </a:r>
+            <a:r>
+              <a:rPr dirty="0" err="1"/>
+              <a:t>админке</a:t>
+            </a:r>
+            <a:r>
+              <a:rPr lang="ru-RU" dirty="0"/>
+              <a:t> с разделением по проектам</a:t>
+            </a:r>
+            <a:endParaRPr dirty="0"/>
           </a:p>
         </p:txBody>
       </p:sp>
@@ -7913,7 +5125,7 @@
         <p:spPr>
           <a:xfrm>
             <a:off x="1280160" y="2130552"/>
-            <a:ext cx="1828800" cy="256032"/>
+            <a:ext cx="1828800" cy="230832"/>
           </a:xfrm>
           <a:prstGeom prst="rect">
             <a:avLst/>
@@ -7934,9 +5146,10 @@
               </a:defRPr>
             </a:pPr>
             <a:r>
-              <a:rPr dirty="0"/>
-              <a:t>Epoch8</a:t>
-            </a:r>
+              <a:rPr lang="ru-RU" dirty="0"/>
+              <a:t>Управление проектами</a:t>
+            </a:r>
+            <a:endParaRPr dirty="0"/>
           </a:p>
         </p:txBody>
       </p:sp>
@@ -8115,7 +5328,7 @@
         <p:spPr>
           <a:xfrm>
             <a:off x="1280160" y="3182112"/>
-            <a:ext cx="1828800" cy="256032"/>
+            <a:ext cx="1828800" cy="230832"/>
           </a:xfrm>
           <a:prstGeom prst="rect">
             <a:avLst/>
@@ -8136,8 +5349,10 @@
               </a:defRPr>
             </a:pPr>
             <a:r>
-              <a:t>Заказчик</a:t>
-            </a:r>
+              <a:rPr lang="ru-RU" dirty="0"/>
+              <a:t>Просмотр данных проекта</a:t>
+            </a:r>
+            <a:endParaRPr dirty="0"/>
           </a:p>
         </p:txBody>
       </p:sp>
@@ -9626,7 +6841,7 @@
           </a:solidFill>
           <a:ln w="19050">
             <a:solidFill>
-              <a:srgbClr val="D4A84B"/>
+              <a:srgbClr val="FFC000"/>
             </a:solidFill>
           </a:ln>
         </p:spPr>
@@ -9834,7 +7049,7 @@
           </a:solidFill>
           <a:ln w="19050">
             <a:solidFill>
-              <a:srgbClr val="9B7ED0"/>
+              <a:srgbClr val="5B8DEF"/>
             </a:solidFill>
           </a:ln>
         </p:spPr>
@@ -9938,7 +7153,7 @@
           </a:solidFill>
           <a:ln w="19050">
             <a:solidFill>
-              <a:srgbClr val="9B7ED0"/>
+              <a:srgbClr val="5B8DEF"/>
             </a:solidFill>
           </a:ln>
         </p:spPr>
@@ -13088,7 +10303,7 @@
         </p:nvSpPr>
         <p:spPr>
           <a:xfrm>
-            <a:off x="667512" y="3054096"/>
+            <a:off x="579120" y="3675888"/>
             <a:ext cx="5596128" cy="530352"/>
           </a:xfrm>
           <a:prstGeom prst="roundRect">
@@ -13186,7 +10401,7 @@
         </p:nvSpPr>
         <p:spPr>
           <a:xfrm>
-            <a:off x="667512" y="3657600"/>
+            <a:off x="667512" y="3063240"/>
             <a:ext cx="5596128" cy="530352"/>
           </a:xfrm>
           <a:prstGeom prst="roundRect">
@@ -13227,8 +10442,10 @@
               </a:defRPr>
             </a:pPr>
             <a:r>
-              <a:t>Разные конфиги → разный UI в одном app</a:t>
-            </a:r>
+              <a:rPr lang="ru-RU" dirty="0"/>
+              <a:t>Заполняет данные формы и подтверждает формирование пакета</a:t>
+            </a:r>
+            <a:endParaRPr dirty="0"/>
           </a:p>
         </p:txBody>
       </p:sp>
@@ -13384,6 +10601,77 @@
           </a:p>
         </p:txBody>
       </p:sp>
+      <p:sp>
+        <p:nvSpPr>
+          <p:cNvPr id="23" name="Прямоугольник 22">
+            <a:extLst>
+              <a:ext uri="{FF2B5EF4-FFF2-40B4-BE49-F238E27FC236}">
+                <a16:creationId xmlns:a16="http://schemas.microsoft.com/office/drawing/2014/main" id="{C31AAC72-BE57-408C-95F7-B5B5DF735D1C}"/>
+              </a:ext>
+            </a:extLst>
+          </p:cNvPr>
+          <p:cNvSpPr/>
+          <p:nvPr/>
+        </p:nvSpPr>
+        <p:spPr>
+          <a:xfrm>
+            <a:off x="167640" y="5550622"/>
+            <a:ext cx="6096000" cy="923330"/>
+          </a:xfrm>
+          <a:prstGeom prst="rect">
+            <a:avLst/>
+          </a:prstGeom>
+        </p:spPr>
+        <p:txBody>
+          <a:bodyPr>
+            <a:spAutoFit/>
+          </a:bodyPr>
+          <a:lstStyle/>
+          <a:p>
+            <a:r>
+              <a:rPr lang="ru-RU" dirty="0">
+                <a:solidFill>
+                  <a:schemeClr val="tx1">
+                    <a:lumMod val="50000"/>
+                    <a:lumOff val="50000"/>
+                  </a:schemeClr>
+                </a:solidFill>
+              </a:rPr>
+              <a:t>Более подробно https://app.notion.com/p/epoch8/360facc20beb80d086e1fda6582bf52f</a:t>
+            </a:r>
+          </a:p>
+        </p:txBody>
+      </p:sp>
+      <p:pic>
+        <p:nvPicPr>
+          <p:cNvPr id="25" name="Рисунок 24">
+            <a:extLst>
+              <a:ext uri="{FF2B5EF4-FFF2-40B4-BE49-F238E27FC236}">
+                <a16:creationId xmlns:a16="http://schemas.microsoft.com/office/drawing/2014/main" id="{74E23811-421E-45CC-ABE3-C7777C8BFC89}"/>
+              </a:ext>
+            </a:extLst>
+          </p:cNvPr>
+          <p:cNvPicPr>
+            <a:picLocks noChangeAspect="1"/>
+          </p:cNvPicPr>
+          <p:nvPr/>
+        </p:nvPicPr>
+        <p:blipFill>
+          <a:blip r:embed="rId2"/>
+          <a:stretch>
+            <a:fillRect/>
+          </a:stretch>
+        </p:blipFill>
+        <p:spPr>
+          <a:xfrm>
+            <a:off x="6907417" y="1385237"/>
+            <a:ext cx="4341951" cy="4576651"/>
+          </a:xfrm>
+          <a:prstGeom prst="rect">
+            <a:avLst/>
+          </a:prstGeom>
+        </p:spPr>
+      </p:pic>
     </p:spTree>
   </p:cSld>
   <p:clrMapOvr>
@@ -13528,7 +10816,7 @@
             <a:avLst/>
           </a:prstGeom>
           <a:solidFill>
-            <a:srgbClr val="9B7ED0"/>
+            <a:srgbClr val="3DCC85"/>
           </a:solidFill>
           <a:ln>
             <a:noFill/>
@@ -13666,7 +10954,7 @@
               </a:defRPr>
             </a:pPr>
             <a:r>
-              <a:t>08 / 11</a:t>
+              <a:t>10 / 11</a:t>
             </a:r>
           </a:p>
         </p:txBody>
@@ -13690,7 +10978,7 @@
           </a:solidFill>
           <a:ln w="12700">
             <a:solidFill>
-              <a:srgbClr val="9B7ED0"/>
+              <a:srgbClr val="3DCC85"/>
             </a:solidFill>
           </a:ln>
         </p:spPr>
@@ -13715,13 +11003,19 @@
             <a:pPr algn="ctr">
               <a:defRPr sz="900" b="1">
                 <a:solidFill>
-                  <a:srgbClr val="9B7ED0"/>
+                  <a:srgbClr val="3DCC85"/>
                 </a:solidFill>
               </a:defRPr>
             </a:pPr>
             <a:r>
-              <a:t>STEP 03</a:t>
-            </a:r>
+              <a:rPr dirty="0"/>
+              <a:t>STEP 0</a:t>
+            </a:r>
+            <a:r>
+              <a:rPr lang="ru-RU" dirty="0"/>
+              <a:t>3</a:t>
+            </a:r>
+            <a:endParaRPr dirty="0"/>
           </a:p>
         </p:txBody>
       </p:sp>
@@ -13740,7 +11034,7 @@
             <a:avLst/>
           </a:prstGeom>
           <a:solidFill>
-            <a:srgbClr val="9B7ED0"/>
+            <a:srgbClr val="3DCC85"/>
           </a:solidFill>
           <a:ln>
             <a:noFill/>
@@ -13772,8 +11066,10 @@
               </a:defRPr>
             </a:pPr>
             <a:r>
+              <a:rPr lang="ru-RU" dirty="0"/>
               <a:t>3</a:t>
             </a:r>
+            <a:endParaRPr dirty="0"/>
           </a:p>
         </p:txBody>
       </p:sp>
@@ -13785,8 +11081,8 @@
         </p:nvSpPr>
         <p:spPr>
           <a:xfrm>
-            <a:off x="594360" y="932688"/>
-            <a:ext cx="10058400" cy="685800"/>
+            <a:off x="594360" y="777240"/>
+            <a:ext cx="5351219" cy="553998"/>
           </a:xfrm>
           <a:prstGeom prst="rect">
             <a:avLst/>
@@ -13807,8 +11103,26 @@
               </a:defRPr>
             </a:pPr>
             <a:r>
-              <a:t>Сборщик сдаёт пакет</a:t>
-            </a:r>
+              <a:rPr dirty="0" err="1"/>
+              <a:t>Просмотр</a:t>
+            </a:r>
+            <a:r>
+              <a:rPr dirty="0"/>
+              <a:t> </a:t>
+            </a:r>
+            <a:r>
+              <a:rPr dirty="0" err="1"/>
+              <a:t>принятых</a:t>
+            </a:r>
+            <a:r>
+              <a:rPr dirty="0"/>
+              <a:t> </a:t>
+            </a:r>
+            <a:r>
+              <a:rPr dirty="0" err="1"/>
+              <a:t>пакетов</a:t>
+            </a:r>
+            <a:endParaRPr dirty="0"/>
           </a:p>
         </p:txBody>
       </p:sp>
@@ -13820,7 +11134,7 @@
         </p:nvSpPr>
         <p:spPr>
           <a:xfrm>
-            <a:off x="594360" y="1645920"/>
+            <a:off x="594360" y="1490472"/>
             <a:ext cx="2011680" cy="45720"/>
           </a:xfrm>
           <a:prstGeom prst="rect">
@@ -13858,20 +11172,20 @@
       </p:sp>
       <p:sp>
         <p:nvSpPr>
-          <p:cNvPr id="12" name="Rectangle 11"/>
+          <p:cNvPr id="13" name="Rectangle 12"/>
           <p:cNvSpPr/>
           <p:nvPr/>
         </p:nvSpPr>
         <p:spPr>
           <a:xfrm>
-            <a:off x="594360" y="1901952"/>
+            <a:off x="594360" y="1929383"/>
             <a:ext cx="45720" cy="420624"/>
           </a:xfrm>
           <a:prstGeom prst="rect">
             <a:avLst/>
           </a:prstGeom>
           <a:solidFill>
-            <a:srgbClr val="9B7ED0"/>
+            <a:srgbClr val="3DCC85"/>
           </a:solidFill>
           <a:ln>
             <a:noFill/>
@@ -13902,14 +11216,14 @@
       </p:sp>
       <p:sp>
         <p:nvSpPr>
-          <p:cNvPr id="13" name="Rounded Rectangle 12"/>
+          <p:cNvPr id="14" name="Rounded Rectangle 13"/>
           <p:cNvSpPr/>
           <p:nvPr/>
         </p:nvSpPr>
         <p:spPr>
           <a:xfrm>
-            <a:off x="667512" y="1847088"/>
-            <a:ext cx="5596128" cy="530352"/>
+            <a:off x="667512" y="1874519"/>
+            <a:ext cx="5230368" cy="530352"/>
           </a:xfrm>
           <a:prstGeom prst="roundRect">
             <a:avLst/>
@@ -13949,27 +11263,77 @@
               </a:defRPr>
             </a:pPr>
             <a:r>
-              <a:t>Проходит сценарий по config.flow</a:t>
-            </a:r>
-          </a:p>
-        </p:txBody>
-      </p:sp>
-      <p:sp>
-        <p:nvSpPr>
-          <p:cNvPr id="14" name="Rectangle 13"/>
+              <a:rPr dirty="0" err="1"/>
+              <a:t>Список</a:t>
+            </a:r>
+            <a:r>
+              <a:rPr dirty="0"/>
+              <a:t> </a:t>
+            </a:r>
+            <a:r>
+              <a:rPr dirty="0" err="1"/>
+              <a:t>все</a:t>
+            </a:r>
+            <a:r>
+              <a:rPr lang="ru-RU" dirty="0"/>
+              <a:t>х</a:t>
+            </a:r>
+            <a:r>
+              <a:rPr dirty="0"/>
+              <a:t> </a:t>
+            </a:r>
+            <a:r>
+              <a:rPr dirty="0" err="1"/>
+              <a:t>приняты</a:t>
+            </a:r>
+            <a:r>
+              <a:rPr lang="ru-RU" dirty="0"/>
+              <a:t>х</a:t>
+            </a:r>
+            <a:r>
+              <a:rPr dirty="0"/>
+              <a:t> </a:t>
+            </a:r>
+            <a:r>
+              <a:rPr dirty="0" err="1"/>
+              <a:t>пакет</a:t>
+            </a:r>
+            <a:r>
+              <a:rPr lang="ru-RU" dirty="0" err="1"/>
+              <a:t>ов</a:t>
+            </a:r>
+            <a:r>
+              <a:rPr dirty="0"/>
+              <a:t> </a:t>
+            </a:r>
+            <a:r>
+              <a:rPr lang="ru-RU" dirty="0"/>
+              <a:t>по проектам </a:t>
+            </a:r>
+            <a:r>
+              <a:rPr dirty="0" err="1"/>
+              <a:t>проекта</a:t>
+            </a:r>
+            <a:endParaRPr dirty="0"/>
+          </a:p>
+        </p:txBody>
+      </p:sp>
+      <p:sp>
+        <p:nvSpPr>
+          <p:cNvPr id="15" name="Rectangle 14"/>
           <p:cNvSpPr/>
           <p:nvPr/>
         </p:nvSpPr>
         <p:spPr>
           <a:xfrm>
-            <a:off x="594360" y="2505456"/>
+            <a:off x="594360" y="2532887"/>
             <a:ext cx="45720" cy="420624"/>
           </a:xfrm>
           <a:prstGeom prst="rect">
             <a:avLst/>
           </a:prstGeom>
           <a:solidFill>
-            <a:srgbClr val="9B7ED0"/>
+            <a:srgbClr val="3DCC85"/>
           </a:solidFill>
           <a:ln>
             <a:noFill/>
@@ -14000,14 +11364,14 @@
       </p:sp>
       <p:sp>
         <p:nvSpPr>
-          <p:cNvPr id="15" name="Rounded Rectangle 14"/>
+          <p:cNvPr id="16" name="Rounded Rectangle 15"/>
           <p:cNvSpPr/>
           <p:nvPr/>
         </p:nvSpPr>
         <p:spPr>
           <a:xfrm>
-            <a:off x="667512" y="2450592"/>
-            <a:ext cx="5596128" cy="530352"/>
+            <a:off x="667512" y="2478023"/>
+            <a:ext cx="5230368" cy="530352"/>
           </a:xfrm>
           <a:prstGeom prst="roundRect">
             <a:avLst/>
@@ -14047,27 +11411,27 @@
               </a:defRPr>
             </a:pPr>
             <a:r>
-              <a:t>Пакет = поля + фото + манифест</a:t>
-            </a:r>
-          </a:p>
-        </p:txBody>
-      </p:sp>
-      <p:sp>
-        <p:nvSpPr>
-          <p:cNvPr id="16" name="Rectangle 15"/>
+              <a:t>Фильтры: проект, статус, поиск по полям</a:t>
+            </a:r>
+          </a:p>
+        </p:txBody>
+      </p:sp>
+      <p:sp>
+        <p:nvSpPr>
+          <p:cNvPr id="17" name="Rectangle 16"/>
           <p:cNvSpPr/>
           <p:nvPr/>
         </p:nvSpPr>
         <p:spPr>
           <a:xfrm>
-            <a:off x="594360" y="3108960"/>
+            <a:off x="594360" y="3136391"/>
             <a:ext cx="45720" cy="420624"/>
           </a:xfrm>
           <a:prstGeom prst="rect">
             <a:avLst/>
           </a:prstGeom>
           <a:solidFill>
-            <a:srgbClr val="9B7ED0"/>
+            <a:srgbClr val="3DCC85"/>
           </a:solidFill>
           <a:ln>
             <a:noFill/>
@@ -14098,14 +11462,14 @@
       </p:sp>
       <p:sp>
         <p:nvSpPr>
-          <p:cNvPr id="17" name="Rounded Rectangle 16"/>
+          <p:cNvPr id="18" name="Rounded Rectangle 17"/>
           <p:cNvSpPr/>
           <p:nvPr/>
         </p:nvSpPr>
         <p:spPr>
           <a:xfrm>
-            <a:off x="667512" y="3054096"/>
-            <a:ext cx="5596128" cy="530352"/>
+            <a:off x="667512" y="3081527"/>
+            <a:ext cx="5230368" cy="530352"/>
           </a:xfrm>
           <a:prstGeom prst="roundRect">
             <a:avLst/>
@@ -14145,27 +11509,61 @@
               </a:defRPr>
             </a:pPr>
             <a:r>
-              <a:t>Черновик сохраняется локально</a:t>
-            </a:r>
-          </a:p>
-        </p:txBody>
-      </p:sp>
-      <p:sp>
-        <p:nvSpPr>
-          <p:cNvPr id="18" name="Rectangle 17"/>
+              <a:rPr dirty="0" err="1"/>
+              <a:t>данные</a:t>
+            </a:r>
+            <a:r>
+              <a:rPr dirty="0"/>
+              <a:t> · </a:t>
+            </a:r>
+            <a:r>
+              <a:rPr dirty="0" err="1"/>
+              <a:t>медиа</a:t>
+            </a:r>
+            <a:r>
+              <a:rPr dirty="0"/>
+              <a:t> · </a:t>
+            </a:r>
+            <a:r>
+              <a:rPr lang="ru-RU" dirty="0"/>
+              <a:t>визуализации</a:t>
+            </a:r>
+            <a:r>
+              <a:rPr dirty="0"/>
+              <a:t> · </a:t>
+            </a:r>
+            <a:r>
+              <a:rPr dirty="0" err="1"/>
+              <a:t>история</a:t>
+            </a:r>
+            <a:r>
+              <a:rPr dirty="0"/>
+              <a:t> </a:t>
+            </a:r>
+            <a:r>
+              <a:rPr dirty="0" err="1"/>
+              <a:t>правок</a:t>
+            </a:r>
+            <a:endParaRPr dirty="0"/>
+          </a:p>
+        </p:txBody>
+      </p:sp>
+      <p:sp>
+        <p:nvSpPr>
+          <p:cNvPr id="19" name="Rectangle 18"/>
           <p:cNvSpPr/>
           <p:nvPr/>
         </p:nvSpPr>
         <p:spPr>
           <a:xfrm>
-            <a:off x="594360" y="3712464"/>
+            <a:off x="594360" y="3739895"/>
             <a:ext cx="45720" cy="420624"/>
           </a:xfrm>
           <a:prstGeom prst="rect">
             <a:avLst/>
           </a:prstGeom>
           <a:solidFill>
-            <a:srgbClr val="9B7ED0"/>
+            <a:srgbClr val="3DCC85"/>
           </a:solidFill>
           <a:ln>
             <a:noFill/>
@@ -14196,14 +11594,14 @@
       </p:sp>
       <p:sp>
         <p:nvSpPr>
-          <p:cNvPr id="19" name="Rounded Rectangle 18"/>
+          <p:cNvPr id="20" name="Rounded Rectangle 19"/>
           <p:cNvSpPr/>
           <p:nvPr/>
         </p:nvSpPr>
         <p:spPr>
           <a:xfrm>
-            <a:off x="667512" y="3657600"/>
-            <a:ext cx="5596128" cy="530352"/>
+            <a:off x="667512" y="3685031"/>
+            <a:ext cx="5230368" cy="530352"/>
           </a:xfrm>
           <a:prstGeom prst="roundRect">
             <a:avLst/>
@@ -14243,14 +11641,62 @@
               </a:defRPr>
             </a:pPr>
             <a:r>
-              <a:t>Upload на сервер при появлении сети</a:t>
-            </a:r>
-          </a:p>
-        </p:txBody>
-      </p:sp>
-      <p:sp>
-        <p:nvSpPr>
-          <p:cNvPr id="20" name="Rounded Rectangle 19"/>
+              <a:rPr dirty="0"/>
+              <a:t>UI </a:t>
+            </a:r>
+            <a:r>
+              <a:rPr dirty="0" err="1"/>
+              <a:t>строится</a:t>
+            </a:r>
+            <a:r>
+              <a:rPr dirty="0"/>
+              <a:t> </a:t>
+            </a:r>
+            <a:r>
+              <a:rPr dirty="0" err="1"/>
+              <a:t>из</a:t>
+            </a:r>
+            <a:r>
+              <a:rPr dirty="0"/>
+              <a:t> </a:t>
+            </a:r>
+            <a:r>
+              <a:rPr dirty="0" err="1"/>
+              <a:t>тех</a:t>
+            </a:r>
+            <a:r>
+              <a:rPr dirty="0"/>
+              <a:t> </a:t>
+            </a:r>
+            <a:r>
+              <a:rPr dirty="0" err="1"/>
+              <a:t>же</a:t>
+            </a:r>
+            <a:r>
+              <a:rPr dirty="0"/>
+              <a:t> </a:t>
+            </a:r>
+            <a:r>
+              <a:rPr lang="ru-RU" dirty="0"/>
+              <a:t>полей в конфиге</a:t>
+            </a:r>
+            <a:r>
+              <a:rPr lang="en-US" dirty="0"/>
+              <a:t> </a:t>
+            </a:r>
+            <a:endParaRPr dirty="0"/>
+          </a:p>
+        </p:txBody>
+      </p:sp>
+      <p:sp>
+        <p:nvSpPr>
+          <p:cNvPr id="40" name="Rounded Rectangle 19">
+            <a:extLst>
+              <a:ext uri="{FF2B5EF4-FFF2-40B4-BE49-F238E27FC236}">
+                <a16:creationId xmlns:a16="http://schemas.microsoft.com/office/drawing/2014/main" id="{3F3825C5-CB5F-4F2A-96F2-0E7D9EDBC253}"/>
+              </a:ext>
+            </a:extLst>
+          </p:cNvPr>
           <p:cNvSpPr/>
           <p:nvPr/>
         </p:nvSpPr>
@@ -14267,7 +11713,7 @@
           </a:solidFill>
           <a:ln w="12700">
             <a:solidFill>
-              <a:srgbClr val="9B7ED0"/>
+              <a:srgbClr val="3DCC85"/>
             </a:solidFill>
           </a:ln>
         </p:spPr>
@@ -14290,67 +11736,19 @@
           <a:lstStyle/>
           <a:p>
             <a:pPr algn="ctr"/>
-            <a:endParaRPr/>
-          </a:p>
-        </p:txBody>
-      </p:sp>
-      <p:sp>
-        <p:nvSpPr>
-          <p:cNvPr id="21" name="Rounded Rectangle 20"/>
-          <p:cNvSpPr/>
-          <p:nvPr/>
-        </p:nvSpPr>
-        <p:spPr>
-          <a:xfrm>
-            <a:off x="6629400" y="1051560"/>
-            <a:ext cx="4892040" cy="5166360"/>
-          </a:xfrm>
-          <a:prstGeom prst="roundRect">
-            <a:avLst/>
-          </a:prstGeom>
-          <a:solidFill>
-            <a:srgbClr val="182030"/>
-          </a:solidFill>
-          <a:ln w="12700">
-            <a:solidFill>
-              <a:srgbClr val="3A4558"/>
-            </a:solidFill>
-          </a:ln>
-        </p:spPr>
-        <p:style>
-          <a:lnRef idx="1">
-            <a:schemeClr val="accent1"/>
-          </a:lnRef>
-          <a:fillRef idx="3">
-            <a:schemeClr val="accent1"/>
-          </a:fillRef>
-          <a:effectRef idx="2">
-            <a:schemeClr val="accent1"/>
-          </a:effectRef>
-          <a:fontRef idx="minor">
-            <a:schemeClr val="lt1"/>
-          </a:fontRef>
-        </p:style>
-        <p:txBody>
-          <a:bodyPr rtlCol="0" anchor="ctr"/>
-          <a:lstStyle/>
-          <a:p>
-            <a:pPr algn="ctr">
-              <a:defRPr sz="1000">
-                <a:solidFill>
-                  <a:srgbClr val="9CA3AF"/>
-                </a:solidFill>
-              </a:defRPr>
-            </a:pPr>
-            <a:r>
-              <a:t>форма · review · статус загрузки</a:t>
-            </a:r>
-          </a:p>
-        </p:txBody>
-      </p:sp>
-      <p:sp>
-        <p:nvSpPr>
-          <p:cNvPr id="22" name="Rounded Rectangle 21"/>
+            <a:endParaRPr dirty="0"/>
+          </a:p>
+        </p:txBody>
+      </p:sp>
+      <p:sp>
+        <p:nvSpPr>
+          <p:cNvPr id="41" name="Rounded Rectangle 21">
+            <a:extLst>
+              <a:ext uri="{FF2B5EF4-FFF2-40B4-BE49-F238E27FC236}">
+                <a16:creationId xmlns:a16="http://schemas.microsoft.com/office/drawing/2014/main" id="{43CED1F8-6DB5-434E-9E2D-338C5F032A06}"/>
+              </a:ext>
+            </a:extLst>
+          </p:cNvPr>
           <p:cNvSpPr/>
           <p:nvPr/>
         </p:nvSpPr>
@@ -14363,7 +11761,7 @@
             <a:avLst/>
           </a:prstGeom>
           <a:solidFill>
-            <a:srgbClr val="9B7ED0"/>
+            <a:srgbClr val="3DCC85"/>
           </a:solidFill>
           <a:ln>
             <a:noFill/>
@@ -14395,11 +11793,42 @@
               </a:defRPr>
             </a:pPr>
             <a:r>
+              <a:rPr dirty="0"/>
               <a:t>SCREENSHOT</a:t>
             </a:r>
           </a:p>
         </p:txBody>
       </p:sp>
+      <p:pic>
+        <p:nvPicPr>
+          <p:cNvPr id="43" name="Рисунок 42">
+            <a:extLst>
+              <a:ext uri="{FF2B5EF4-FFF2-40B4-BE49-F238E27FC236}">
+                <a16:creationId xmlns:a16="http://schemas.microsoft.com/office/drawing/2014/main" id="{361C04F5-1C9D-4AED-BEE5-58789DC8881C}"/>
+              </a:ext>
+            </a:extLst>
+          </p:cNvPr>
+          <p:cNvPicPr>
+            <a:picLocks noChangeAspect="1"/>
+          </p:cNvPicPr>
+          <p:nvPr/>
+        </p:nvPicPr>
+        <p:blipFill>
+          <a:blip r:embed="rId2"/>
+          <a:stretch>
+            <a:fillRect/>
+          </a:stretch>
+        </p:blipFill>
+        <p:spPr>
+          <a:xfrm>
+            <a:off x="6842472" y="1316736"/>
+            <a:ext cx="4465895" cy="4707295"/>
+          </a:xfrm>
+          <a:prstGeom prst="rect">
+            <a:avLst/>
+          </a:prstGeom>
+        </p:spPr>
+      </p:pic>
     </p:spTree>
   </p:cSld>
   <p:clrMapOvr>
@@ -14416,13 +11845,13 @@
         <a:gradFill rotWithShape="1">
           <a:gsLst>
             <a:gs pos="0">
+              <a:srgbClr val="0E1828"/>
+            </a:gs>
+            <a:gs pos="100000">
               <a:srgbClr val="0A0E18"/>
             </a:gs>
-            <a:gs pos="100000">
-              <a:srgbClr val="182030"/>
-            </a:gs>
           </a:gsLst>
-          <a:lin ang="13500000" scaled="0"/>
+          <a:lin ang="12000000" scaled="0"/>
         </a:gradFill>
         <a:effectLst/>
       </p:bgPr>
@@ -14538,7 +11967,7 @@
         <p:spPr>
           <a:xfrm>
             <a:off x="0" y="0"/>
-            <a:ext cx="12191695" cy="54864"/>
+            <a:ext cx="12191695" cy="73152"/>
           </a:xfrm>
           <a:prstGeom prst="rect">
             <a:avLst/>
@@ -14575,23 +12004,25 @@
       </p:sp>
       <p:sp>
         <p:nvSpPr>
-          <p:cNvPr id="5" name="Rectangle 4"/>
+          <p:cNvPr id="5" name="Rounded Rectangle 4"/>
           <p:cNvSpPr/>
           <p:nvPr/>
         </p:nvSpPr>
         <p:spPr>
           <a:xfrm>
-            <a:off x="0" y="6565392"/>
-            <a:ext cx="12191695" cy="292608"/>
-          </a:xfrm>
-          <a:prstGeom prst="rect">
-            <a:avLst/>
-          </a:prstGeom>
-          <a:solidFill>
-            <a:srgbClr val="0A0E18"/>
-          </a:solidFill>
-          <a:ln>
-            <a:noFill/>
+            <a:off x="1097280" y="1371600"/>
+            <a:ext cx="9966960" cy="4114800"/>
+          </a:xfrm>
+          <a:prstGeom prst="roundRect">
+            <a:avLst/>
+          </a:prstGeom>
+          <a:solidFill>
+            <a:srgbClr val="1E2A3D"/>
+          </a:solidFill>
+          <a:ln w="12700">
+            <a:solidFill>
+              <a:srgbClr val="3DCC85"/>
+            </a:solidFill>
           </a:ln>
         </p:spPr>
         <p:style>
@@ -14625,8 +12056,8 @@
         </p:nvSpPr>
         <p:spPr>
           <a:xfrm>
-            <a:off x="594360" y="6583680"/>
-            <a:ext cx="3657600" cy="256032"/>
+            <a:off x="1508760" y="1691640"/>
+            <a:ext cx="9144000" cy="548640"/>
           </a:xfrm>
           <a:prstGeom prst="rect">
             <a:avLst/>
@@ -14639,15 +12070,15 @@
           </a:bodyPr>
           <a:lstStyle/>
           <a:p>
-            <a:pPr algn="l">
-              <a:defRPr sz="900" b="0">
+            <a:pPr algn="ctr">
+              <a:defRPr sz="2800" b="1">
                 <a:solidFill>
-                  <a:srgbClr val="6B7280"/>
+                  <a:srgbClr val="E8EAED"/>
                 </a:solidFill>
               </a:defRPr>
             </a:pPr>
             <a:r>
-              <a:t>Data Collector  ·  Epoch8</a:t>
+              <a:t>Data Collector в одном предложении</a:t>
             </a:r>
           </a:p>
         </p:txBody>
@@ -14655,6 +12086,182 @@
       <p:sp>
         <p:nvSpPr>
           <p:cNvPr id="7" name="TextBox 6"/>
+          <p:cNvSpPr txBox="1"/>
+          <p:nvPr/>
+        </p:nvSpPr>
+        <p:spPr>
+          <a:xfrm>
+            <a:off x="1508760" y="2423160"/>
+            <a:ext cx="9144000" cy="1015663"/>
+          </a:xfrm>
+          <a:prstGeom prst="rect">
+            <a:avLst/>
+          </a:prstGeom>
+          <a:noFill/>
+        </p:spPr>
+        <p:txBody>
+          <a:bodyPr wrap="square" anchor="t">
+            <a:spAutoFit/>
+          </a:bodyPr>
+          <a:lstStyle/>
+          <a:p>
+            <a:pPr algn="ctr">
+              <a:defRPr sz="1800" b="0">
+                <a:solidFill>
+                  <a:srgbClr val="9CA3AF"/>
+                </a:solidFill>
+              </a:defRPr>
+            </a:pPr>
+            <a:r>
+              <a:rPr sz="2000" dirty="0" err="1"/>
+              <a:t>Админ</a:t>
+            </a:r>
+            <a:r>
+              <a:rPr sz="2000" dirty="0"/>
+              <a:t> </a:t>
+            </a:r>
+            <a:r>
+              <a:rPr sz="2000" dirty="0" err="1"/>
+              <a:t>описывает</a:t>
+            </a:r>
+            <a:r>
+              <a:rPr sz="2000" dirty="0"/>
+              <a:t> </a:t>
+            </a:r>
+            <a:r>
+              <a:rPr sz="2000" dirty="0" err="1"/>
+              <a:t>сценарий</a:t>
+            </a:r>
+            <a:r>
+              <a:rPr sz="2000" dirty="0"/>
+              <a:t> в JSON → </a:t>
+            </a:r>
+            <a:r>
+              <a:rPr sz="2000" dirty="0" err="1"/>
+              <a:t>приложение</a:t>
+            </a:r>
+            <a:r>
+              <a:rPr sz="2000" dirty="0"/>
+              <a:t> </a:t>
+            </a:r>
+            <a:r>
+              <a:rPr sz="2000" dirty="0" err="1"/>
+              <a:t>проводит</a:t>
+            </a:r>
+            <a:r>
+              <a:rPr sz="2000" dirty="0"/>
+              <a:t> </a:t>
+            </a:r>
+            <a:r>
+              <a:rPr sz="2000" dirty="0" err="1"/>
+              <a:t>сборщика</a:t>
+            </a:r>
+            <a:r>
+              <a:rPr sz="2000" dirty="0"/>
+              <a:t> </a:t>
+            </a:r>
+            <a:r>
+              <a:rPr sz="2000" dirty="0" err="1"/>
+              <a:t>по</a:t>
+            </a:r>
+            <a:r>
+              <a:rPr sz="2000" dirty="0"/>
+              <a:t> </a:t>
+            </a:r>
+            <a:r>
+              <a:rPr sz="2000" dirty="0" err="1"/>
+              <a:t>шагам</a:t>
+            </a:r>
+            <a:r>
+              <a:rPr sz="2000" dirty="0"/>
+              <a:t> → </a:t>
+            </a:r>
+            <a:r>
+              <a:rPr sz="2000" dirty="0" err="1"/>
+              <a:t>пакет</a:t>
+            </a:r>
+            <a:r>
+              <a:rPr sz="2000" dirty="0"/>
+              <a:t> с </a:t>
+            </a:r>
+            <a:r>
+              <a:rPr sz="2000" dirty="0" err="1"/>
+              <a:t>медиа</a:t>
+            </a:r>
+            <a:r>
+              <a:rPr sz="2000" dirty="0"/>
+              <a:t> </a:t>
+            </a:r>
+            <a:r>
+              <a:rPr sz="2000" dirty="0" err="1"/>
+              <a:t>попадает</a:t>
+            </a:r>
+            <a:r>
+              <a:rPr sz="2000" dirty="0"/>
+              <a:t> в </a:t>
+            </a:r>
+            <a:r>
+              <a:rPr sz="2000" dirty="0" err="1"/>
+              <a:t>админку</a:t>
+            </a:r>
+            <a:r>
+              <a:rPr sz="2000" dirty="0"/>
+              <a:t> → </a:t>
+            </a:r>
+            <a:r>
+              <a:rPr sz="2000" dirty="0" err="1"/>
+              <a:t>команда</a:t>
+            </a:r>
+            <a:r>
+              <a:rPr sz="2000" dirty="0"/>
+              <a:t> </a:t>
+            </a:r>
+            <a:r>
+              <a:rPr sz="2000" dirty="0" err="1"/>
+              <a:t>видит</a:t>
+            </a:r>
+            <a:r>
+              <a:rPr sz="2000" dirty="0"/>
+              <a:t> </a:t>
+            </a:r>
+            <a:r>
+              <a:rPr sz="2000" dirty="0" err="1"/>
+              <a:t>данные</a:t>
+            </a:r>
+            <a:r>
+              <a:rPr sz="2000" dirty="0"/>
+              <a:t> </a:t>
+            </a:r>
+            <a:r>
+              <a:rPr sz="2000" dirty="0" err="1"/>
+              <a:t>без</a:t>
+            </a:r>
+            <a:r>
+              <a:rPr sz="2000" dirty="0"/>
+              <a:t> </a:t>
+            </a:r>
+            <a:r>
+              <a:rPr sz="2000" dirty="0" err="1"/>
+              <a:t>ручной</a:t>
+            </a:r>
+            <a:r>
+              <a:rPr sz="2000" dirty="0"/>
+              <a:t> </a:t>
+            </a:r>
+            <a:r>
+              <a:rPr sz="2000" dirty="0" err="1"/>
+              <a:t>склейки</a:t>
+            </a:r>
+            <a:r>
+              <a:rPr sz="2000" dirty="0"/>
+              <a:t>.</a:t>
+            </a:r>
+          </a:p>
+        </p:txBody>
+      </p:sp>
+      <p:sp>
+        <p:nvSpPr>
+          <p:cNvPr id="9" name="TextBox 8"/>
           <p:cNvSpPr txBox="1"/>
           <p:nvPr/>
         </p:nvSpPr>
@@ -14682,1255 +12289,11 @@
               </a:defRPr>
             </a:pPr>
             <a:r>
-              <a:t>09 / 11</a:t>
-            </a:r>
-          </a:p>
-        </p:txBody>
-      </p:sp>
-      <p:sp>
-        <p:nvSpPr>
-          <p:cNvPr id="8" name="Rounded Rectangle 7"/>
-          <p:cNvSpPr/>
-          <p:nvPr/>
-        </p:nvSpPr>
-        <p:spPr>
-          <a:xfrm>
-            <a:off x="594360" y="411480"/>
-            <a:ext cx="1645920" cy="292608"/>
-          </a:xfrm>
-          <a:prstGeom prst="roundRect">
-            <a:avLst/>
-          </a:prstGeom>
-          <a:solidFill>
-            <a:srgbClr val="1E2A3D"/>
-          </a:solidFill>
-          <a:ln w="12700">
-            <a:solidFill>
-              <a:srgbClr val="3DCC85"/>
-            </a:solidFill>
-          </a:ln>
-        </p:spPr>
-        <p:style>
-          <a:lnRef idx="1">
-            <a:schemeClr val="accent1"/>
-          </a:lnRef>
-          <a:fillRef idx="3">
-            <a:schemeClr val="accent1"/>
-          </a:fillRef>
-          <a:effectRef idx="2">
-            <a:schemeClr val="accent1"/>
-          </a:effectRef>
-          <a:fontRef idx="minor">
-            <a:schemeClr val="lt1"/>
-          </a:fontRef>
-        </p:style>
-        <p:txBody>
-          <a:bodyPr rtlCol="0" anchor="ctr"/>
-          <a:lstStyle/>
-          <a:p>
-            <a:pPr algn="ctr">
-              <a:defRPr sz="900" b="1">
-                <a:solidFill>
-                  <a:srgbClr val="3DCC85"/>
-                </a:solidFill>
-              </a:defRPr>
-            </a:pPr>
-            <a:r>
-              <a:t>STEP 04</a:t>
-            </a:r>
-          </a:p>
-        </p:txBody>
-      </p:sp>
-      <p:sp>
-        <p:nvSpPr>
-          <p:cNvPr id="9" name="Oval 8"/>
-          <p:cNvSpPr/>
-          <p:nvPr/>
-        </p:nvSpPr>
-        <p:spPr>
-          <a:xfrm>
-            <a:off x="594360" y="347472"/>
-            <a:ext cx="457200" cy="457200"/>
-          </a:xfrm>
-          <a:prstGeom prst="ellipse">
-            <a:avLst/>
-          </a:prstGeom>
-          <a:solidFill>
-            <a:srgbClr val="3DCC85"/>
-          </a:solidFill>
-          <a:ln>
-            <a:noFill/>
-          </a:ln>
-        </p:spPr>
-        <p:style>
-          <a:lnRef idx="1">
-            <a:schemeClr val="accent1"/>
-          </a:lnRef>
-          <a:fillRef idx="3">
-            <a:schemeClr val="accent1"/>
-          </a:fillRef>
-          <a:effectRef idx="2">
-            <a:schemeClr val="accent1"/>
-          </a:effectRef>
-          <a:fontRef idx="minor">
-            <a:schemeClr val="lt1"/>
-          </a:fontRef>
-        </p:style>
-        <p:txBody>
-          <a:bodyPr rtlCol="0" anchor="ctr"/>
-          <a:lstStyle/>
-          <a:p>
-            <a:pPr algn="ctr">
-              <a:defRPr sz="1500" b="1">
-                <a:solidFill>
-                  <a:srgbClr val="121218"/>
-                </a:solidFill>
-              </a:defRPr>
-            </a:pPr>
-            <a:r>
-              <a:t>4</a:t>
-            </a:r>
-          </a:p>
-        </p:txBody>
-      </p:sp>
-      <p:sp>
-        <p:nvSpPr>
-          <p:cNvPr id="10" name="TextBox 9"/>
-          <p:cNvSpPr txBox="1"/>
-          <p:nvPr/>
-        </p:nvSpPr>
-        <p:spPr>
-          <a:xfrm>
-            <a:off x="594360" y="932688"/>
-            <a:ext cx="10058400" cy="685800"/>
-          </a:xfrm>
-          <a:prstGeom prst="rect">
-            <a:avLst/>
-          </a:prstGeom>
-          <a:noFill/>
-        </p:spPr>
-        <p:txBody>
-          <a:bodyPr wrap="square" anchor="t">
-            <a:spAutoFit/>
-          </a:bodyPr>
-          <a:lstStyle/>
-          <a:p>
-            <a:pPr algn="l">
-              <a:defRPr sz="3000" b="1">
-                <a:solidFill>
-                  <a:srgbClr val="E8EAED"/>
-                </a:solidFill>
-              </a:defRPr>
-            </a:pPr>
-            <a:r>
-              <a:t>Пакет принят на сервер</a:t>
-            </a:r>
-          </a:p>
-        </p:txBody>
-      </p:sp>
-      <p:sp>
-        <p:nvSpPr>
-          <p:cNvPr id="11" name="Rectangle 10"/>
-          <p:cNvSpPr/>
-          <p:nvPr/>
-        </p:nvSpPr>
-        <p:spPr>
-          <a:xfrm>
-            <a:off x="594360" y="1645920"/>
-            <a:ext cx="2011680" cy="45720"/>
-          </a:xfrm>
-          <a:prstGeom prst="rect">
-            <a:avLst/>
-          </a:prstGeom>
-          <a:solidFill>
-            <a:srgbClr val="5B8DEF"/>
-          </a:solidFill>
-          <a:ln>
-            <a:noFill/>
-          </a:ln>
-        </p:spPr>
-        <p:style>
-          <a:lnRef idx="1">
-            <a:schemeClr val="accent1"/>
-          </a:lnRef>
-          <a:fillRef idx="3">
-            <a:schemeClr val="accent1"/>
-          </a:fillRef>
-          <a:effectRef idx="2">
-            <a:schemeClr val="accent1"/>
-          </a:effectRef>
-          <a:fontRef idx="minor">
-            <a:schemeClr val="lt1"/>
-          </a:fontRef>
-        </p:style>
-        <p:txBody>
-          <a:bodyPr rtlCol="0" anchor="ctr"/>
-          <a:lstStyle/>
-          <a:p>
-            <a:pPr algn="ctr"/>
-            <a:endParaRPr/>
-          </a:p>
-        </p:txBody>
-      </p:sp>
-      <p:sp>
-        <p:nvSpPr>
-          <p:cNvPr id="12" name="Rectangle 11"/>
-          <p:cNvSpPr/>
-          <p:nvPr/>
-        </p:nvSpPr>
-        <p:spPr>
-          <a:xfrm>
-            <a:off x="594360" y="1901952"/>
-            <a:ext cx="45720" cy="420624"/>
-          </a:xfrm>
-          <a:prstGeom prst="rect">
-            <a:avLst/>
-          </a:prstGeom>
-          <a:solidFill>
-            <a:srgbClr val="3DCC85"/>
-          </a:solidFill>
-          <a:ln>
-            <a:noFill/>
-          </a:ln>
-        </p:spPr>
-        <p:style>
-          <a:lnRef idx="1">
-            <a:schemeClr val="accent1"/>
-          </a:lnRef>
-          <a:fillRef idx="3">
-            <a:schemeClr val="accent1"/>
-          </a:fillRef>
-          <a:effectRef idx="2">
-            <a:schemeClr val="accent1"/>
-          </a:effectRef>
-          <a:fontRef idx="minor">
-            <a:schemeClr val="lt1"/>
-          </a:fontRef>
-        </p:style>
-        <p:txBody>
-          <a:bodyPr rtlCol="0" anchor="ctr"/>
-          <a:lstStyle/>
-          <a:p>
-            <a:pPr algn="ctr"/>
-            <a:endParaRPr/>
-          </a:p>
-        </p:txBody>
-      </p:sp>
-      <p:sp>
-        <p:nvSpPr>
-          <p:cNvPr id="13" name="Rounded Rectangle 12"/>
-          <p:cNvSpPr/>
-          <p:nvPr/>
-        </p:nvSpPr>
-        <p:spPr>
-          <a:xfrm>
-            <a:off x="667512" y="1847088"/>
-            <a:ext cx="5596128" cy="530352"/>
-          </a:xfrm>
-          <a:prstGeom prst="roundRect">
-            <a:avLst/>
-          </a:prstGeom>
-          <a:solidFill>
-            <a:srgbClr val="1E2A3D"/>
-          </a:solidFill>
-          <a:ln w="12700">
-            <a:solidFill>
-              <a:srgbClr val="3A4558"/>
-            </a:solidFill>
-          </a:ln>
-        </p:spPr>
-        <p:style>
-          <a:lnRef idx="1">
-            <a:schemeClr val="accent1"/>
-          </a:lnRef>
-          <a:fillRef idx="3">
-            <a:schemeClr val="accent1"/>
-          </a:fillRef>
-          <a:effectRef idx="2">
-            <a:schemeClr val="accent1"/>
-          </a:effectRef>
-          <a:fontRef idx="minor">
-            <a:schemeClr val="lt1"/>
-          </a:fontRef>
-        </p:style>
-        <p:txBody>
-          <a:bodyPr rtlCol="0" anchor="ctr"/>
-          <a:lstStyle/>
-          <a:p>
-            <a:pPr algn="ctr">
-              <a:defRPr sz="1300" b="0">
-                <a:solidFill>
-                  <a:srgbClr val="E8EAED"/>
-                </a:solidFill>
-              </a:defRPr>
-            </a:pPr>
-            <a:r>
-              <a:t>После upload пакет появляется в админке</a:t>
-            </a:r>
-          </a:p>
-        </p:txBody>
-      </p:sp>
-      <p:sp>
-        <p:nvSpPr>
-          <p:cNvPr id="14" name="Rectangle 13"/>
-          <p:cNvSpPr/>
-          <p:nvPr/>
-        </p:nvSpPr>
-        <p:spPr>
-          <a:xfrm>
-            <a:off x="594360" y="2505456"/>
-            <a:ext cx="45720" cy="420624"/>
-          </a:xfrm>
-          <a:prstGeom prst="rect">
-            <a:avLst/>
-          </a:prstGeom>
-          <a:solidFill>
-            <a:srgbClr val="3DCC85"/>
-          </a:solidFill>
-          <a:ln>
-            <a:noFill/>
-          </a:ln>
-        </p:spPr>
-        <p:style>
-          <a:lnRef idx="1">
-            <a:schemeClr val="accent1"/>
-          </a:lnRef>
-          <a:fillRef idx="3">
-            <a:schemeClr val="accent1"/>
-          </a:fillRef>
-          <a:effectRef idx="2">
-            <a:schemeClr val="accent1"/>
-          </a:effectRef>
-          <a:fontRef idx="minor">
-            <a:schemeClr val="lt1"/>
-          </a:fontRef>
-        </p:style>
-        <p:txBody>
-          <a:bodyPr rtlCol="0" anchor="ctr"/>
-          <a:lstStyle/>
-          <a:p>
-            <a:pPr algn="ctr"/>
-            <a:endParaRPr/>
-          </a:p>
-        </p:txBody>
-      </p:sp>
-      <p:sp>
-        <p:nvSpPr>
-          <p:cNvPr id="15" name="Rounded Rectangle 14"/>
-          <p:cNvSpPr/>
-          <p:nvPr/>
-        </p:nvSpPr>
-        <p:spPr>
-          <a:xfrm>
-            <a:off x="667512" y="2450592"/>
-            <a:ext cx="5596128" cy="530352"/>
-          </a:xfrm>
-          <a:prstGeom prst="roundRect">
-            <a:avLst/>
-          </a:prstGeom>
-          <a:solidFill>
-            <a:srgbClr val="1E2A3D"/>
-          </a:solidFill>
-          <a:ln w="12700">
-            <a:solidFill>
-              <a:srgbClr val="3A4558"/>
-            </a:solidFill>
-          </a:ln>
-        </p:spPr>
-        <p:style>
-          <a:lnRef idx="1">
-            <a:schemeClr val="accent1"/>
-          </a:lnRef>
-          <a:fillRef idx="3">
-            <a:schemeClr val="accent1"/>
-          </a:fillRef>
-          <a:effectRef idx="2">
-            <a:schemeClr val="accent1"/>
-          </a:effectRef>
-          <a:fontRef idx="minor">
-            <a:schemeClr val="lt1"/>
-          </a:fontRef>
-        </p:style>
-        <p:txBody>
-          <a:bodyPr rtlCol="0" anchor="ctr"/>
-          <a:lstStyle/>
-          <a:p>
-            <a:pPr algn="ctr">
-              <a:defRPr sz="1300" b="0">
-                <a:solidFill>
-                  <a:srgbClr val="E8EAED"/>
-                </a:solidFill>
-              </a:defRPr>
-            </a:pPr>
-            <a:r>
-              <a:t>Привязан к project_id и config версии</a:t>
-            </a:r>
-          </a:p>
-        </p:txBody>
-      </p:sp>
-      <p:sp>
-        <p:nvSpPr>
-          <p:cNvPr id="16" name="Rectangle 15"/>
-          <p:cNvSpPr/>
-          <p:nvPr/>
-        </p:nvSpPr>
-        <p:spPr>
-          <a:xfrm>
-            <a:off x="594360" y="3108960"/>
-            <a:ext cx="45720" cy="420624"/>
-          </a:xfrm>
-          <a:prstGeom prst="rect">
-            <a:avLst/>
-          </a:prstGeom>
-          <a:solidFill>
-            <a:srgbClr val="3DCC85"/>
-          </a:solidFill>
-          <a:ln>
-            <a:noFill/>
-          </a:ln>
-        </p:spPr>
-        <p:style>
-          <a:lnRef idx="1">
-            <a:schemeClr val="accent1"/>
-          </a:lnRef>
-          <a:fillRef idx="3">
-            <a:schemeClr val="accent1"/>
-          </a:fillRef>
-          <a:effectRef idx="2">
-            <a:schemeClr val="accent1"/>
-          </a:effectRef>
-          <a:fontRef idx="minor">
-            <a:schemeClr val="lt1"/>
-          </a:fontRef>
-        </p:style>
-        <p:txBody>
-          <a:bodyPr rtlCol="0" anchor="ctr"/>
-          <a:lstStyle/>
-          <a:p>
-            <a:pPr algn="ctr"/>
-            <a:endParaRPr/>
-          </a:p>
-        </p:txBody>
-      </p:sp>
-      <p:sp>
-        <p:nvSpPr>
-          <p:cNvPr id="17" name="Rounded Rectangle 16"/>
-          <p:cNvSpPr/>
-          <p:nvPr/>
-        </p:nvSpPr>
-        <p:spPr>
-          <a:xfrm>
-            <a:off x="667512" y="3054096"/>
-            <a:ext cx="5596128" cy="530352"/>
-          </a:xfrm>
-          <a:prstGeom prst="roundRect">
-            <a:avLst/>
-          </a:prstGeom>
-          <a:solidFill>
-            <a:srgbClr val="1E2A3D"/>
-          </a:solidFill>
-          <a:ln w="12700">
-            <a:solidFill>
-              <a:srgbClr val="3A4558"/>
-            </a:solidFill>
-          </a:ln>
-        </p:spPr>
-        <p:style>
-          <a:lnRef idx="1">
-            <a:schemeClr val="accent1"/>
-          </a:lnRef>
-          <a:fillRef idx="3">
-            <a:schemeClr val="accent1"/>
-          </a:fillRef>
-          <a:effectRef idx="2">
-            <a:schemeClr val="accent1"/>
-          </a:effectRef>
-          <a:fontRef idx="minor">
-            <a:schemeClr val="lt1"/>
-          </a:fontRef>
-        </p:style>
-        <p:txBody>
-          <a:bodyPr rtlCol="0" anchor="ctr"/>
-          <a:lstStyle/>
-          <a:p>
-            <a:pPr algn="ctr">
-              <a:defRPr sz="1300" b="0">
-                <a:solidFill>
-                  <a:srgbClr val="E8EAED"/>
-                </a:solidFill>
-              </a:defRPr>
-            </a:pPr>
-            <a:r>
-              <a:t>Манифест + blobs хранятся на сервере</a:t>
-            </a:r>
-          </a:p>
-        </p:txBody>
-      </p:sp>
-      <p:sp>
-        <p:nvSpPr>
-          <p:cNvPr id="18" name="Rectangle 17"/>
-          <p:cNvSpPr/>
-          <p:nvPr/>
-        </p:nvSpPr>
-        <p:spPr>
-          <a:xfrm>
-            <a:off x="594360" y="3712464"/>
-            <a:ext cx="45720" cy="420624"/>
-          </a:xfrm>
-          <a:prstGeom prst="rect">
-            <a:avLst/>
-          </a:prstGeom>
-          <a:solidFill>
-            <a:srgbClr val="3DCC85"/>
-          </a:solidFill>
-          <a:ln>
-            <a:noFill/>
-          </a:ln>
-        </p:spPr>
-        <p:style>
-          <a:lnRef idx="1">
-            <a:schemeClr val="accent1"/>
-          </a:lnRef>
-          <a:fillRef idx="3">
-            <a:schemeClr val="accent1"/>
-          </a:fillRef>
-          <a:effectRef idx="2">
-            <a:schemeClr val="accent1"/>
-          </a:effectRef>
-          <a:fontRef idx="minor">
-            <a:schemeClr val="lt1"/>
-          </a:fontRef>
-        </p:style>
-        <p:txBody>
-          <a:bodyPr rtlCol="0" anchor="ctr"/>
-          <a:lstStyle/>
-          <a:p>
-            <a:pPr algn="ctr"/>
-            <a:endParaRPr/>
-          </a:p>
-        </p:txBody>
-      </p:sp>
-      <p:sp>
-        <p:nvSpPr>
-          <p:cNvPr id="19" name="Rounded Rectangle 18"/>
-          <p:cNvSpPr/>
-          <p:nvPr/>
-        </p:nvSpPr>
-        <p:spPr>
-          <a:xfrm>
-            <a:off x="667512" y="3657600"/>
-            <a:ext cx="5596128" cy="530352"/>
-          </a:xfrm>
-          <a:prstGeom prst="roundRect">
-            <a:avLst/>
-          </a:prstGeom>
-          <a:solidFill>
-            <a:srgbClr val="1E2A3D"/>
-          </a:solidFill>
-          <a:ln w="12700">
-            <a:solidFill>
-              <a:srgbClr val="3A4558"/>
-            </a:solidFill>
-          </a:ln>
-        </p:spPr>
-        <p:style>
-          <a:lnRef idx="1">
-            <a:schemeClr val="accent1"/>
-          </a:lnRef>
-          <a:fillRef idx="3">
-            <a:schemeClr val="accent1"/>
-          </a:fillRef>
-          <a:effectRef idx="2">
-            <a:schemeClr val="accent1"/>
-          </a:effectRef>
-          <a:fontRef idx="minor">
-            <a:schemeClr val="lt1"/>
-          </a:fontRef>
-        </p:style>
-        <p:txBody>
-          <a:bodyPr rtlCol="0" anchor="ctr"/>
-          <a:lstStyle/>
-          <a:p>
-            <a:pPr algn="ctr">
-              <a:defRPr sz="1300" b="0">
-                <a:solidFill>
-                  <a:srgbClr val="E8EAED"/>
-                </a:solidFill>
-              </a:defRPr>
-            </a:pPr>
-            <a:r>
-              <a:t>Готов к просмотру и анализу</a:t>
-            </a:r>
-          </a:p>
-        </p:txBody>
-      </p:sp>
-      <p:sp>
-        <p:nvSpPr>
-          <p:cNvPr id="20" name="Rounded Rectangle 19"/>
-          <p:cNvSpPr/>
-          <p:nvPr/>
-        </p:nvSpPr>
-        <p:spPr>
-          <a:xfrm>
-            <a:off x="6537960" y="960120"/>
-            <a:ext cx="5074920" cy="5349240"/>
-          </a:xfrm>
-          <a:prstGeom prst="roundRect">
-            <a:avLst/>
-          </a:prstGeom>
-          <a:solidFill>
-            <a:srgbClr val="0A0E18"/>
-          </a:solidFill>
-          <a:ln w="12700">
-            <a:solidFill>
-              <a:srgbClr val="3A4558"/>
-            </a:solidFill>
-          </a:ln>
-        </p:spPr>
-        <p:style>
-          <a:lnRef idx="1">
-            <a:schemeClr val="accent1"/>
-          </a:lnRef>
-          <a:fillRef idx="3">
-            <a:schemeClr val="accent1"/>
-          </a:fillRef>
-          <a:effectRef idx="2">
-            <a:schemeClr val="accent1"/>
-          </a:effectRef>
-          <a:fontRef idx="minor">
-            <a:schemeClr val="lt1"/>
-          </a:fontRef>
-        </p:style>
-        <p:txBody>
-          <a:bodyPr rtlCol="0" anchor="ctr"/>
-          <a:lstStyle/>
-          <a:p>
-            <a:pPr algn="ctr"/>
-            <a:endParaRPr/>
-          </a:p>
-        </p:txBody>
-      </p:sp>
-      <p:sp>
-        <p:nvSpPr>
-          <p:cNvPr id="21" name="Rounded Rectangle 20"/>
-          <p:cNvSpPr/>
-          <p:nvPr/>
-        </p:nvSpPr>
-        <p:spPr>
-          <a:xfrm>
-            <a:off x="7388809" y="1143000"/>
-            <a:ext cx="3373221" cy="621792"/>
-          </a:xfrm>
-          <a:prstGeom prst="roundRect">
-            <a:avLst/>
-          </a:prstGeom>
-          <a:solidFill>
-            <a:srgbClr val="1E2A3D"/>
-          </a:solidFill>
-          <a:ln w="19050">
-            <a:solidFill>
-              <a:srgbClr val="3DCC85"/>
-            </a:solidFill>
-          </a:ln>
-        </p:spPr>
-        <p:style>
-          <a:lnRef idx="1">
-            <a:schemeClr val="accent1"/>
-          </a:lnRef>
-          <a:fillRef idx="3">
-            <a:schemeClr val="accent1"/>
-          </a:fillRef>
-          <a:effectRef idx="2">
-            <a:schemeClr val="accent1"/>
-          </a:effectRef>
-          <a:fontRef idx="minor">
-            <a:schemeClr val="lt1"/>
-          </a:fontRef>
-        </p:style>
-        <p:txBody>
-          <a:bodyPr wrap="square" lIns="101600" rIns="101600" rtlCol="0" anchor="ctr"/>
-          <a:lstStyle/>
-          <a:p>
-            <a:pPr algn="ctr">
-              <a:defRPr sz="1100" b="1">
-                <a:solidFill>
-                  <a:srgbClr val="E8EAED"/>
-                </a:solidFill>
-              </a:defRPr>
-            </a:pPr>
-            <a:r>
-              <a:t>/ui/packages/</a:t>
-            </a:r>
-          </a:p>
-          <a:p>
-            <a:pPr algn="ctr">
-              <a:spcBef>
-                <a:spcPts val="300"/>
-              </a:spcBef>
-              <a:defRPr sz="800">
-                <a:solidFill>
-                  <a:srgbClr val="9CA3AF"/>
-                </a:solidFill>
-              </a:defRPr>
-            </a:pPr>
-            <a:r>
-              <a:t>список принятых пакетов</a:t>
-            </a:r>
-          </a:p>
-        </p:txBody>
-      </p:sp>
-      <p:sp>
-        <p:nvSpPr>
-          <p:cNvPr id="22" name="Rounded Rectangle 21"/>
-          <p:cNvSpPr/>
-          <p:nvPr/>
-        </p:nvSpPr>
-        <p:spPr>
-          <a:xfrm>
-            <a:off x="6757416" y="2057400"/>
-            <a:ext cx="1545336" cy="384048"/>
-          </a:xfrm>
-          <a:prstGeom prst="roundRect">
-            <a:avLst/>
-          </a:prstGeom>
-          <a:solidFill>
-            <a:srgbClr val="141A26"/>
-          </a:solidFill>
-          <a:ln w="19050">
-            <a:solidFill>
-              <a:srgbClr val="3A4558"/>
-            </a:solidFill>
-          </a:ln>
-        </p:spPr>
-        <p:style>
-          <a:lnRef idx="1">
-            <a:schemeClr val="accent1"/>
-          </a:lnRef>
-          <a:fillRef idx="3">
-            <a:schemeClr val="accent1"/>
-          </a:fillRef>
-          <a:effectRef idx="2">
-            <a:schemeClr val="accent1"/>
-          </a:effectRef>
-          <a:fontRef idx="minor">
-            <a:schemeClr val="lt1"/>
-          </a:fontRef>
-        </p:style>
-        <p:txBody>
-          <a:bodyPr wrap="square" lIns="101600" rIns="101600" rtlCol="0" anchor="ctr"/>
-          <a:lstStyle/>
-          <a:p>
-            <a:pPr algn="ctr">
-              <a:defRPr sz="900" b="1">
-                <a:solidFill>
-                  <a:srgbClr val="E8EAED"/>
-                </a:solidFill>
-              </a:defRPr>
-            </a:pPr>
-            <a:r>
-              <a:t>проект</a:t>
-            </a:r>
-          </a:p>
-        </p:txBody>
-      </p:sp>
-      <p:sp>
-        <p:nvSpPr>
-          <p:cNvPr id="23" name="Rounded Rectangle 22"/>
-          <p:cNvSpPr/>
-          <p:nvPr/>
-        </p:nvSpPr>
-        <p:spPr>
-          <a:xfrm>
-            <a:off x="8348472" y="2057400"/>
-            <a:ext cx="1545336" cy="384048"/>
-          </a:xfrm>
-          <a:prstGeom prst="roundRect">
-            <a:avLst/>
-          </a:prstGeom>
-          <a:solidFill>
-            <a:srgbClr val="141A26"/>
-          </a:solidFill>
-          <a:ln w="19050">
-            <a:solidFill>
-              <a:srgbClr val="3A4558"/>
-            </a:solidFill>
-          </a:ln>
-        </p:spPr>
-        <p:style>
-          <a:lnRef idx="1">
-            <a:schemeClr val="accent1"/>
-          </a:lnRef>
-          <a:fillRef idx="3">
-            <a:schemeClr val="accent1"/>
-          </a:fillRef>
-          <a:effectRef idx="2">
-            <a:schemeClr val="accent1"/>
-          </a:effectRef>
-          <a:fontRef idx="minor">
-            <a:schemeClr val="lt1"/>
-          </a:fontRef>
-        </p:style>
-        <p:txBody>
-          <a:bodyPr wrap="square" lIns="101600" rIns="101600" rtlCol="0" anchor="ctr"/>
-          <a:lstStyle/>
-          <a:p>
-            <a:pPr algn="ctr">
-              <a:defRPr sz="900" b="1">
-                <a:solidFill>
-                  <a:srgbClr val="E8EAED"/>
-                </a:solidFill>
-              </a:defRPr>
-            </a:pPr>
-            <a:r>
-              <a:t>статус</a:t>
-            </a:r>
-          </a:p>
-        </p:txBody>
-      </p:sp>
-      <p:sp>
-        <p:nvSpPr>
-          <p:cNvPr id="24" name="Rounded Rectangle 23"/>
-          <p:cNvSpPr/>
-          <p:nvPr/>
-        </p:nvSpPr>
-        <p:spPr>
-          <a:xfrm>
-            <a:off x="9939528" y="2057400"/>
-            <a:ext cx="1545336" cy="384048"/>
-          </a:xfrm>
-          <a:prstGeom prst="roundRect">
-            <a:avLst/>
-          </a:prstGeom>
-          <a:solidFill>
-            <a:srgbClr val="141A26"/>
-          </a:solidFill>
-          <a:ln w="19050">
-            <a:solidFill>
-              <a:srgbClr val="3A4558"/>
-            </a:solidFill>
-          </a:ln>
-        </p:spPr>
-        <p:style>
-          <a:lnRef idx="1">
-            <a:schemeClr val="accent1"/>
-          </a:lnRef>
-          <a:fillRef idx="3">
-            <a:schemeClr val="accent1"/>
-          </a:fillRef>
-          <a:effectRef idx="2">
-            <a:schemeClr val="accent1"/>
-          </a:effectRef>
-          <a:fontRef idx="minor">
-            <a:schemeClr val="lt1"/>
-          </a:fontRef>
-        </p:style>
-        <p:txBody>
-          <a:bodyPr wrap="square" lIns="101600" rIns="101600" rtlCol="0" anchor="ctr"/>
-          <a:lstStyle/>
-          <a:p>
-            <a:pPr algn="ctr">
-              <a:defRPr sz="900" b="1">
-                <a:solidFill>
-                  <a:srgbClr val="E8EAED"/>
-                </a:solidFill>
-              </a:defRPr>
-            </a:pPr>
-            <a:r>
-              <a:t>поиск</a:t>
-            </a:r>
-          </a:p>
-        </p:txBody>
-      </p:sp>
-      <p:cxnSp>
-        <p:nvCxnSpPr>
-          <p:cNvPr id="25" name="Connector 24"/>
-          <p:cNvCxnSpPr/>
-          <p:nvPr/>
-        </p:nvCxnSpPr>
-        <p:spPr>
-          <a:xfrm>
-            <a:off x="0" y="1764792"/>
-            <a:ext cx="0" cy="292608"/>
-          </a:xfrm>
-          <a:prstGeom prst="line">
-            <a:avLst/>
-          </a:prstGeom>
-          <a:ln w="25400">
-            <a:solidFill>
-              <a:srgbClr val="3DCC85"/>
-            </a:solidFill>
-          </a:ln>
-        </p:spPr>
-        <p:style>
-          <a:lnRef idx="2">
-            <a:schemeClr val="accent1"/>
-          </a:lnRef>
-          <a:fillRef idx="0">
-            <a:schemeClr val="accent1"/>
-          </a:fillRef>
-          <a:effectRef idx="1">
-            <a:schemeClr val="accent1"/>
-          </a:effectRef>
-          <a:fontRef idx="minor">
-            <a:schemeClr val="tx1"/>
-          </a:fontRef>
-        </p:style>
-      </p:cxnSp>
-      <p:sp>
-        <p:nvSpPr>
-          <p:cNvPr id="26" name="Rounded Rectangle 25"/>
-          <p:cNvSpPr/>
-          <p:nvPr/>
-        </p:nvSpPr>
-        <p:spPr>
-          <a:xfrm>
-            <a:off x="7147864" y="2587752"/>
-            <a:ext cx="3855110" cy="566928"/>
-          </a:xfrm>
-          <a:prstGeom prst="roundRect">
-            <a:avLst/>
-          </a:prstGeom>
-          <a:solidFill>
-            <a:srgbClr val="1A2E28"/>
-          </a:solidFill>
-          <a:ln w="19050">
-            <a:solidFill>
-              <a:srgbClr val="3DCC85"/>
-            </a:solidFill>
-          </a:ln>
-        </p:spPr>
-        <p:style>
-          <a:lnRef idx="1">
-            <a:schemeClr val="accent1"/>
-          </a:lnRef>
-          <a:fillRef idx="3">
-            <a:schemeClr val="accent1"/>
-          </a:fillRef>
-          <a:effectRef idx="2">
-            <a:schemeClr val="accent1"/>
-          </a:effectRef>
-          <a:fontRef idx="minor">
-            <a:schemeClr val="lt1"/>
-          </a:fontRef>
-        </p:style>
-        <p:txBody>
-          <a:bodyPr wrap="square" lIns="101600" rIns="101600" rtlCol="0" anchor="ctr"/>
-          <a:lstStyle/>
-          <a:p>
-            <a:pPr algn="ctr">
-              <a:defRPr sz="1100" b="1">
-                <a:solidFill>
-                  <a:srgbClr val="E8EAED"/>
-                </a:solidFill>
-              </a:defRPr>
-            </a:pPr>
-            <a:r>
-              <a:t>Package Workspace</a:t>
-            </a:r>
-          </a:p>
-          <a:p>
-            <a:pPr algn="ctr">
-              <a:spcBef>
-                <a:spcPts val="300"/>
-              </a:spcBef>
-              <a:defRPr sz="800">
-                <a:solidFill>
-                  <a:srgbClr val="9CA3AF"/>
-                </a:solidFill>
-              </a:defRPr>
-            </a:pPr>
-            <a:r>
-              <a:t>один пакет · все данные</a:t>
-            </a:r>
-          </a:p>
-        </p:txBody>
-      </p:sp>
-      <p:cxnSp>
-        <p:nvCxnSpPr>
-          <p:cNvPr id="27" name="Connector 26"/>
-          <p:cNvCxnSpPr/>
-          <p:nvPr/>
-        </p:nvCxnSpPr>
-        <p:spPr>
-          <a:xfrm>
-            <a:off x="0" y="2441448"/>
-            <a:ext cx="0" cy="146304"/>
-          </a:xfrm>
-          <a:prstGeom prst="line">
-            <a:avLst/>
-          </a:prstGeom>
-          <a:ln w="25400">
-            <a:solidFill>
-              <a:srgbClr val="3DCC85"/>
-            </a:solidFill>
-          </a:ln>
-        </p:spPr>
-        <p:style>
-          <a:lnRef idx="2">
-            <a:schemeClr val="accent1"/>
-          </a:lnRef>
-          <a:fillRef idx="0">
-            <a:schemeClr val="accent1"/>
-          </a:fillRef>
-          <a:effectRef idx="1">
-            <a:schemeClr val="accent1"/>
-          </a:effectRef>
-          <a:fontRef idx="minor">
-            <a:schemeClr val="tx1"/>
-          </a:fontRef>
-        </p:style>
-      </p:cxnSp>
-      <p:sp>
-        <p:nvSpPr>
-          <p:cNvPr id="28" name="Rounded Rectangle 27"/>
-          <p:cNvSpPr/>
-          <p:nvPr/>
-        </p:nvSpPr>
-        <p:spPr>
-          <a:xfrm>
-            <a:off x="6665976" y="3410712"/>
-            <a:ext cx="1143000" cy="2788920"/>
-          </a:xfrm>
-          <a:prstGeom prst="roundRect">
-            <a:avLst/>
-          </a:prstGeom>
-          <a:solidFill>
-            <a:srgbClr val="1E2A3D"/>
-          </a:solidFill>
-          <a:ln w="19050">
-            <a:solidFill>
-              <a:srgbClr val="5B8DEF"/>
-            </a:solidFill>
-          </a:ln>
-        </p:spPr>
-        <p:style>
-          <a:lnRef idx="1">
-            <a:schemeClr val="accent1"/>
-          </a:lnRef>
-          <a:fillRef idx="3">
-            <a:schemeClr val="accent1"/>
-          </a:fillRef>
-          <a:effectRef idx="2">
-            <a:schemeClr val="accent1"/>
-          </a:effectRef>
-          <a:fontRef idx="minor">
-            <a:schemeClr val="lt1"/>
-          </a:fontRef>
-        </p:style>
-        <p:txBody>
-          <a:bodyPr wrap="square" lIns="101600" rIns="101600" rtlCol="0" anchor="ctr"/>
-          <a:lstStyle/>
-          <a:p>
-            <a:pPr algn="ctr">
-              <a:defRPr sz="1000" b="1">
-                <a:solidFill>
-                  <a:srgbClr val="E8EAED"/>
-                </a:solidFill>
-              </a:defRPr>
-            </a:pPr>
-            <a:r>
-              <a:t>Данные</a:t>
-            </a:r>
-          </a:p>
-        </p:txBody>
-      </p:sp>
-      <p:sp>
-        <p:nvSpPr>
-          <p:cNvPr id="29" name="Rounded Rectangle 28"/>
-          <p:cNvSpPr/>
-          <p:nvPr/>
-        </p:nvSpPr>
-        <p:spPr>
-          <a:xfrm>
-            <a:off x="7891272" y="3410712"/>
-            <a:ext cx="1143000" cy="2788920"/>
-          </a:xfrm>
-          <a:prstGeom prst="roundRect">
-            <a:avLst/>
-          </a:prstGeom>
-          <a:solidFill>
-            <a:srgbClr val="1E2A3D"/>
-          </a:solidFill>
-          <a:ln w="19050">
-            <a:solidFill>
-              <a:srgbClr val="9B7ED0"/>
-            </a:solidFill>
-          </a:ln>
-        </p:spPr>
-        <p:style>
-          <a:lnRef idx="1">
-            <a:schemeClr val="accent1"/>
-          </a:lnRef>
-          <a:fillRef idx="3">
-            <a:schemeClr val="accent1"/>
-          </a:fillRef>
-          <a:effectRef idx="2">
-            <a:schemeClr val="accent1"/>
-          </a:effectRef>
-          <a:fontRef idx="minor">
-            <a:schemeClr val="lt1"/>
-          </a:fontRef>
-        </p:style>
-        <p:txBody>
-          <a:bodyPr wrap="square" lIns="101600" rIns="101600" rtlCol="0" anchor="ctr"/>
-          <a:lstStyle/>
-          <a:p>
-            <a:pPr algn="ctr">
-              <a:defRPr sz="1000" b="1">
-                <a:solidFill>
-                  <a:srgbClr val="E8EAED"/>
-                </a:solidFill>
-              </a:defRPr>
-            </a:pPr>
-            <a:r>
-              <a:t>Медиа</a:t>
-            </a:r>
-          </a:p>
-        </p:txBody>
-      </p:sp>
-      <p:sp>
-        <p:nvSpPr>
-          <p:cNvPr id="30" name="Rounded Rectangle 29"/>
-          <p:cNvSpPr/>
-          <p:nvPr/>
-        </p:nvSpPr>
-        <p:spPr>
-          <a:xfrm>
-            <a:off x="9116568" y="3410712"/>
-            <a:ext cx="1143000" cy="2788920"/>
-          </a:xfrm>
-          <a:prstGeom prst="roundRect">
-            <a:avLst/>
-          </a:prstGeom>
-          <a:solidFill>
-            <a:srgbClr val="1E2A3D"/>
-          </a:solidFill>
-          <a:ln w="19050">
-            <a:solidFill>
-              <a:srgbClr val="3DCC85"/>
-            </a:solidFill>
-          </a:ln>
-        </p:spPr>
-        <p:style>
-          <a:lnRef idx="1">
-            <a:schemeClr val="accent1"/>
-          </a:lnRef>
-          <a:fillRef idx="3">
-            <a:schemeClr val="accent1"/>
-          </a:fillRef>
-          <a:effectRef idx="2">
-            <a:schemeClr val="accent1"/>
-          </a:effectRef>
-          <a:fontRef idx="minor">
-            <a:schemeClr val="lt1"/>
-          </a:fontRef>
-        </p:style>
-        <p:txBody>
-          <a:bodyPr wrap="square" lIns="101600" rIns="101600" rtlCol="0" anchor="ctr"/>
-          <a:lstStyle/>
-          <a:p>
-            <a:pPr algn="ctr">
-              <a:defRPr sz="1000" b="1">
-                <a:solidFill>
-                  <a:srgbClr val="E8EAED"/>
-                </a:solidFill>
-              </a:defRPr>
-            </a:pPr>
-            <a:r>
-              <a:t>Viz</a:t>
-            </a:r>
-          </a:p>
-        </p:txBody>
-      </p:sp>
-      <p:sp>
-        <p:nvSpPr>
-          <p:cNvPr id="31" name="Rounded Rectangle 30"/>
-          <p:cNvSpPr/>
-          <p:nvPr/>
-        </p:nvSpPr>
-        <p:spPr>
-          <a:xfrm>
-            <a:off x="10341864" y="3410712"/>
-            <a:ext cx="1143000" cy="2788920"/>
-          </a:xfrm>
-          <a:prstGeom prst="roundRect">
-            <a:avLst/>
-          </a:prstGeom>
-          <a:solidFill>
-            <a:srgbClr val="1E2A3D"/>
-          </a:solidFill>
-          <a:ln w="19050">
-            <a:solidFill>
-              <a:srgbClr val="D4A84B"/>
-            </a:solidFill>
-          </a:ln>
-        </p:spPr>
-        <p:style>
-          <a:lnRef idx="1">
-            <a:schemeClr val="accent1"/>
-          </a:lnRef>
-          <a:fillRef idx="3">
-            <a:schemeClr val="accent1"/>
-          </a:fillRef>
-          <a:effectRef idx="2">
-            <a:schemeClr val="accent1"/>
-          </a:effectRef>
-          <a:fontRef idx="minor">
-            <a:schemeClr val="lt1"/>
-          </a:fontRef>
-        </p:style>
-        <p:txBody>
-          <a:bodyPr wrap="square" lIns="101600" rIns="101600" rtlCol="0" anchor="ctr"/>
-          <a:lstStyle/>
-          <a:p>
-            <a:pPr algn="ctr">
-              <a:defRPr sz="1000" b="1">
-                <a:solidFill>
-                  <a:srgbClr val="E8EAED"/>
-                </a:solidFill>
-              </a:defRPr>
-            </a:pPr>
-            <a:r>
-              <a:t>История</a:t>
-            </a:r>
-          </a:p>
-        </p:txBody>
-      </p:sp>
-      <p:cxnSp>
-        <p:nvCxnSpPr>
-          <p:cNvPr id="32" name="Connector 31"/>
-          <p:cNvCxnSpPr/>
-          <p:nvPr/>
-        </p:nvCxnSpPr>
-        <p:spPr>
-          <a:xfrm>
-            <a:off x="0" y="3154680"/>
-            <a:ext cx="0" cy="256032"/>
-          </a:xfrm>
-          <a:prstGeom prst="line">
-            <a:avLst/>
-          </a:prstGeom>
-          <a:ln w="25400">
-            <a:solidFill>
-              <a:srgbClr val="3DCC85"/>
-            </a:solidFill>
-          </a:ln>
-        </p:spPr>
-        <p:style>
-          <a:lnRef idx="2">
-            <a:schemeClr val="accent1"/>
-          </a:lnRef>
-          <a:fillRef idx="0">
-            <a:schemeClr val="accent1"/>
-          </a:fillRef>
-          <a:effectRef idx="1">
-            <a:schemeClr val="accent1"/>
-          </a:effectRef>
-          <a:fontRef idx="minor">
-            <a:schemeClr val="tx1"/>
-          </a:fontRef>
-        </p:style>
-      </p:cxnSp>
+              <a:t>11 / 11</a:t>
+            </a:r>
+          </a:p>
+        </p:txBody>
+      </p:sp>
     </p:spTree>
   </p:cSld>
   <p:clrMapOvr>
